--- a/UXP_Presentations/UX_Hypothesis_Testing.pptx
+++ b/UXP_Presentations/UX_Hypothesis_Testing.pptx
@@ -13,20 +13,25 @@
     <p:sldId id="275" r:id="rId7"/>
     <p:sldId id="258" r:id="rId8"/>
     <p:sldId id="276" r:id="rId9"/>
-    <p:sldId id="278" r:id="rId10"/>
-    <p:sldId id="259" r:id="rId11"/>
-    <p:sldId id="277" r:id="rId12"/>
-    <p:sldId id="265" r:id="rId13"/>
-    <p:sldId id="264" r:id="rId14"/>
-    <p:sldId id="266" r:id="rId15"/>
-    <p:sldId id="263" r:id="rId16"/>
-    <p:sldId id="269" r:id="rId17"/>
-    <p:sldId id="270" r:id="rId18"/>
-    <p:sldId id="260" r:id="rId19"/>
-    <p:sldId id="268" r:id="rId20"/>
-    <p:sldId id="267" r:id="rId21"/>
-    <p:sldId id="271" r:id="rId22"/>
-    <p:sldId id="261" r:id="rId23"/>
+    <p:sldId id="284" r:id="rId10"/>
+    <p:sldId id="278" r:id="rId11"/>
+    <p:sldId id="282" r:id="rId12"/>
+    <p:sldId id="283" r:id="rId13"/>
+    <p:sldId id="259" r:id="rId14"/>
+    <p:sldId id="277" r:id="rId15"/>
+    <p:sldId id="279" r:id="rId16"/>
+    <p:sldId id="281" r:id="rId17"/>
+    <p:sldId id="265" r:id="rId18"/>
+    <p:sldId id="264" r:id="rId19"/>
+    <p:sldId id="266" r:id="rId20"/>
+    <p:sldId id="263" r:id="rId21"/>
+    <p:sldId id="269" r:id="rId22"/>
+    <p:sldId id="270" r:id="rId23"/>
+    <p:sldId id="260" r:id="rId24"/>
+    <p:sldId id="268" r:id="rId25"/>
+    <p:sldId id="267" r:id="rId26"/>
+    <p:sldId id="271" r:id="rId27"/>
+    <p:sldId id="261" r:id="rId28"/>
   </p:sldIdLst>
   <p:sldSz cx="9144000" cy="6858000" type="screen4x3"/>
   <p:notesSz cx="6858000" cy="9144000"/>
@@ -147,7 +152,7 @@
 <file path=ppt/revisionInfo.xml><?xml version="1.0" encoding="utf-8"?>
 <p1510:revInfo xmlns:a="http://schemas.openxmlformats.org/drawingml/2006/main" xmlns:r="http://schemas.openxmlformats.org/officeDocument/2006/relationships" xmlns:p1510="http://schemas.microsoft.com/office/powerpoint/2015/10/main">
   <p1510:revLst>
-    <p1510:client id="{518471B4-5DC5-4BFE-AC22-6696140998E6}" v="11" dt="2025-06-19T22:35:05.360"/>
+    <p1510:client id="{518471B4-5DC5-4BFE-AC22-6696140998E6}" v="16" dt="2025-06-20T16:33:20.759"/>
   </p1510:revLst>
 </p1510:revInfo>
 </file>
@@ -157,18 +162,18 @@
   <pc:docChgLst>
     <pc:chgData name="Myers, Chelsea" userId="f282533b-c263-466c-86f9-3d67bd04ab31" providerId="ADAL" clId="{518471B4-5DC5-4BFE-AC22-6696140998E6}"/>
     <pc:docChg chg="undo custSel addSld delSld modSld sldOrd">
-      <pc:chgData name="Myers, Chelsea" userId="f282533b-c263-466c-86f9-3d67bd04ab31" providerId="ADAL" clId="{518471B4-5DC5-4BFE-AC22-6696140998E6}" dt="2025-06-19T22:54:06.761" v="3716" actId="20577"/>
+      <pc:chgData name="Myers, Chelsea" userId="f282533b-c263-466c-86f9-3d67bd04ab31" providerId="ADAL" clId="{518471B4-5DC5-4BFE-AC22-6696140998E6}" dt="2025-06-20T16:38:01.905" v="4706" actId="20577"/>
       <pc:docMkLst>
         <pc:docMk/>
       </pc:docMkLst>
       <pc:sldChg chg="addSp delSp modSp mod">
-        <pc:chgData name="Myers, Chelsea" userId="f282533b-c263-466c-86f9-3d67bd04ab31" providerId="ADAL" clId="{518471B4-5DC5-4BFE-AC22-6696140998E6}" dt="2025-06-19T17:44:23.987" v="2496"/>
+        <pc:chgData name="Myers, Chelsea" userId="f282533b-c263-466c-86f9-3d67bd04ab31" providerId="ADAL" clId="{518471B4-5DC5-4BFE-AC22-6696140998E6}" dt="2025-06-20T15:58:41.007" v="3717"/>
         <pc:sldMkLst>
           <pc:docMk/>
           <pc:sldMk cId="0" sldId="256"/>
         </pc:sldMkLst>
         <pc:spChg chg="mod">
-          <ac:chgData name="Myers, Chelsea" userId="f282533b-c263-466c-86f9-3d67bd04ab31" providerId="ADAL" clId="{518471B4-5DC5-4BFE-AC22-6696140998E6}" dt="2025-06-19T17:44:23.987" v="2496"/>
+          <ac:chgData name="Myers, Chelsea" userId="f282533b-c263-466c-86f9-3d67bd04ab31" providerId="ADAL" clId="{518471B4-5DC5-4BFE-AC22-6696140998E6}" dt="2025-06-20T15:58:41.007" v="3717"/>
           <ac:spMkLst>
             <pc:docMk/>
             <pc:sldMk cId="0" sldId="256"/>
@@ -184,7 +189,7 @@
           </ac:spMkLst>
         </pc:spChg>
         <pc:spChg chg="add mod">
-          <ac:chgData name="Myers, Chelsea" userId="f282533b-c263-466c-86f9-3d67bd04ab31" providerId="ADAL" clId="{518471B4-5DC5-4BFE-AC22-6696140998E6}" dt="2025-06-19T17:44:23.987" v="2496"/>
+          <ac:chgData name="Myers, Chelsea" userId="f282533b-c263-466c-86f9-3d67bd04ab31" providerId="ADAL" clId="{518471B4-5DC5-4BFE-AC22-6696140998E6}" dt="2025-06-20T15:58:41.007" v="3717"/>
           <ac:spMkLst>
             <pc:docMk/>
             <pc:sldMk cId="0" sldId="256"/>
@@ -193,13 +198,13 @@
         </pc:spChg>
       </pc:sldChg>
       <pc:sldChg chg="modSp mod">
-        <pc:chgData name="Myers, Chelsea" userId="f282533b-c263-466c-86f9-3d67bd04ab31" providerId="ADAL" clId="{518471B4-5DC5-4BFE-AC22-6696140998E6}" dt="2025-06-19T22:38:59.814" v="2655" actId="15"/>
+        <pc:chgData name="Myers, Chelsea" userId="f282533b-c263-466c-86f9-3d67bd04ab31" providerId="ADAL" clId="{518471B4-5DC5-4BFE-AC22-6696140998E6}" dt="2025-06-20T15:58:41.007" v="3717"/>
         <pc:sldMkLst>
           <pc:docMk/>
           <pc:sldMk cId="0" sldId="257"/>
         </pc:sldMkLst>
         <pc:spChg chg="mod">
-          <ac:chgData name="Myers, Chelsea" userId="f282533b-c263-466c-86f9-3d67bd04ab31" providerId="ADAL" clId="{518471B4-5DC5-4BFE-AC22-6696140998E6}" dt="2025-06-19T17:44:23.987" v="2496"/>
+          <ac:chgData name="Myers, Chelsea" userId="f282533b-c263-466c-86f9-3d67bd04ab31" providerId="ADAL" clId="{518471B4-5DC5-4BFE-AC22-6696140998E6}" dt="2025-06-20T15:58:41.007" v="3717"/>
           <ac:spMkLst>
             <pc:docMk/>
             <pc:sldMk cId="0" sldId="257"/>
@@ -207,7 +212,7 @@
           </ac:spMkLst>
         </pc:spChg>
         <pc:spChg chg="mod">
-          <ac:chgData name="Myers, Chelsea" userId="f282533b-c263-466c-86f9-3d67bd04ab31" providerId="ADAL" clId="{518471B4-5DC5-4BFE-AC22-6696140998E6}" dt="2025-06-19T22:38:59.814" v="2655" actId="15"/>
+          <ac:chgData name="Myers, Chelsea" userId="f282533b-c263-466c-86f9-3d67bd04ab31" providerId="ADAL" clId="{518471B4-5DC5-4BFE-AC22-6696140998E6}" dt="2025-06-20T15:58:41.007" v="3717"/>
           <ac:spMkLst>
             <pc:docMk/>
             <pc:sldMk cId="0" sldId="257"/>
@@ -216,13 +221,13 @@
         </pc:spChg>
       </pc:sldChg>
       <pc:sldChg chg="delSp modSp mod">
-        <pc:chgData name="Myers, Chelsea" userId="f282533b-c263-466c-86f9-3d67bd04ab31" providerId="ADAL" clId="{518471B4-5DC5-4BFE-AC22-6696140998E6}" dt="2025-06-19T22:53:23.439" v="3688" actId="20577"/>
+        <pc:chgData name="Myers, Chelsea" userId="f282533b-c263-466c-86f9-3d67bd04ab31" providerId="ADAL" clId="{518471B4-5DC5-4BFE-AC22-6696140998E6}" dt="2025-06-20T16:34:25.530" v="4623" actId="20577"/>
         <pc:sldMkLst>
           <pc:docMk/>
           <pc:sldMk cId="0" sldId="258"/>
         </pc:sldMkLst>
         <pc:spChg chg="mod">
-          <ac:chgData name="Myers, Chelsea" userId="f282533b-c263-466c-86f9-3d67bd04ab31" providerId="ADAL" clId="{518471B4-5DC5-4BFE-AC22-6696140998E6}" dt="2025-06-19T22:53:23.439" v="3688" actId="20577"/>
+          <ac:chgData name="Myers, Chelsea" userId="f282533b-c263-466c-86f9-3d67bd04ab31" providerId="ADAL" clId="{518471B4-5DC5-4BFE-AC22-6696140998E6}" dt="2025-06-20T15:58:41.007" v="3717"/>
           <ac:spMkLst>
             <pc:docMk/>
             <pc:sldMk cId="0" sldId="258"/>
@@ -230,7 +235,7 @@
           </ac:spMkLst>
         </pc:spChg>
         <pc:spChg chg="mod">
-          <ac:chgData name="Myers, Chelsea" userId="f282533b-c263-466c-86f9-3d67bd04ab31" providerId="ADAL" clId="{518471B4-5DC5-4BFE-AC22-6696140998E6}" dt="2025-06-19T22:46:53.794" v="3210" actId="20577"/>
+          <ac:chgData name="Myers, Chelsea" userId="f282533b-c263-466c-86f9-3d67bd04ab31" providerId="ADAL" clId="{518471B4-5DC5-4BFE-AC22-6696140998E6}" dt="2025-06-20T16:34:25.530" v="4623" actId="20577"/>
           <ac:spMkLst>
             <pc:docMk/>
             <pc:sldMk cId="0" sldId="258"/>
@@ -247,13 +252,13 @@
         </pc:graphicFrameChg>
       </pc:sldChg>
       <pc:sldChg chg="delSp modSp mod">
-        <pc:chgData name="Myers, Chelsea" userId="f282533b-c263-466c-86f9-3d67bd04ab31" providerId="ADAL" clId="{518471B4-5DC5-4BFE-AC22-6696140998E6}" dt="2025-06-19T22:52:16.453" v="3627" actId="20577"/>
+        <pc:chgData name="Myers, Chelsea" userId="f282533b-c263-466c-86f9-3d67bd04ab31" providerId="ADAL" clId="{518471B4-5DC5-4BFE-AC22-6696140998E6}" dt="2025-06-20T16:08:00.131" v="3916" actId="20577"/>
         <pc:sldMkLst>
           <pc:docMk/>
           <pc:sldMk cId="0" sldId="259"/>
         </pc:sldMkLst>
         <pc:spChg chg="mod">
-          <ac:chgData name="Myers, Chelsea" userId="f282533b-c263-466c-86f9-3d67bd04ab31" providerId="ADAL" clId="{518471B4-5DC5-4BFE-AC22-6696140998E6}" dt="2025-06-19T17:44:23.987" v="2496"/>
+          <ac:chgData name="Myers, Chelsea" userId="f282533b-c263-466c-86f9-3d67bd04ab31" providerId="ADAL" clId="{518471B4-5DC5-4BFE-AC22-6696140998E6}" dt="2025-06-20T15:58:41.007" v="3717"/>
           <ac:spMkLst>
             <pc:docMk/>
             <pc:sldMk cId="0" sldId="259"/>
@@ -261,7 +266,7 @@
           </ac:spMkLst>
         </pc:spChg>
         <pc:spChg chg="mod">
-          <ac:chgData name="Myers, Chelsea" userId="f282533b-c263-466c-86f9-3d67bd04ab31" providerId="ADAL" clId="{518471B4-5DC5-4BFE-AC22-6696140998E6}" dt="2025-06-19T22:52:16.453" v="3627" actId="20577"/>
+          <ac:chgData name="Myers, Chelsea" userId="f282533b-c263-466c-86f9-3d67bd04ab31" providerId="ADAL" clId="{518471B4-5DC5-4BFE-AC22-6696140998E6}" dt="2025-06-20T16:08:00.131" v="3916" actId="20577"/>
           <ac:spMkLst>
             <pc:docMk/>
             <pc:sldMk cId="0" sldId="259"/>
@@ -278,13 +283,13 @@
         </pc:graphicFrameChg>
       </pc:sldChg>
       <pc:sldChg chg="addSp delSp modSp mod ord">
-        <pc:chgData name="Myers, Chelsea" userId="f282533b-c263-466c-86f9-3d67bd04ab31" providerId="ADAL" clId="{518471B4-5DC5-4BFE-AC22-6696140998E6}" dt="2025-06-19T17:44:23.987" v="2496"/>
+        <pc:chgData name="Myers, Chelsea" userId="f282533b-c263-466c-86f9-3d67bd04ab31" providerId="ADAL" clId="{518471B4-5DC5-4BFE-AC22-6696140998E6}" dt="2025-06-20T15:58:41.007" v="3717"/>
         <pc:sldMkLst>
           <pc:docMk/>
           <pc:sldMk cId="0" sldId="260"/>
         </pc:sldMkLst>
         <pc:spChg chg="mod">
-          <ac:chgData name="Myers, Chelsea" userId="f282533b-c263-466c-86f9-3d67bd04ab31" providerId="ADAL" clId="{518471B4-5DC5-4BFE-AC22-6696140998E6}" dt="2025-06-19T17:44:23.987" v="2496"/>
+          <ac:chgData name="Myers, Chelsea" userId="f282533b-c263-466c-86f9-3d67bd04ab31" providerId="ADAL" clId="{518471B4-5DC5-4BFE-AC22-6696140998E6}" dt="2025-06-20T15:58:41.007" v="3717"/>
           <ac:spMkLst>
             <pc:docMk/>
             <pc:sldMk cId="0" sldId="260"/>
@@ -292,7 +297,7 @@
           </ac:spMkLst>
         </pc:spChg>
         <pc:spChg chg="mod">
-          <ac:chgData name="Myers, Chelsea" userId="f282533b-c263-466c-86f9-3d67bd04ab31" providerId="ADAL" clId="{518471B4-5DC5-4BFE-AC22-6696140998E6}" dt="2025-06-19T17:44:23.987" v="2496"/>
+          <ac:chgData name="Myers, Chelsea" userId="f282533b-c263-466c-86f9-3d67bd04ab31" providerId="ADAL" clId="{518471B4-5DC5-4BFE-AC22-6696140998E6}" dt="2025-06-20T15:58:41.007" v="3717"/>
           <ac:spMkLst>
             <pc:docMk/>
             <pc:sldMk cId="0" sldId="260"/>
@@ -317,13 +322,13 @@
         </pc:graphicFrameChg>
       </pc:sldChg>
       <pc:sldChg chg="modSp">
-        <pc:chgData name="Myers, Chelsea" userId="f282533b-c263-466c-86f9-3d67bd04ab31" providerId="ADAL" clId="{518471B4-5DC5-4BFE-AC22-6696140998E6}" dt="2025-06-19T17:44:23.987" v="2496"/>
+        <pc:chgData name="Myers, Chelsea" userId="f282533b-c263-466c-86f9-3d67bd04ab31" providerId="ADAL" clId="{518471B4-5DC5-4BFE-AC22-6696140998E6}" dt="2025-06-20T15:58:41.007" v="3717"/>
         <pc:sldMkLst>
           <pc:docMk/>
           <pc:sldMk cId="0" sldId="261"/>
         </pc:sldMkLst>
         <pc:spChg chg="mod">
-          <ac:chgData name="Myers, Chelsea" userId="f282533b-c263-466c-86f9-3d67bd04ab31" providerId="ADAL" clId="{518471B4-5DC5-4BFE-AC22-6696140998E6}" dt="2025-06-19T17:44:23.987" v="2496"/>
+          <ac:chgData name="Myers, Chelsea" userId="f282533b-c263-466c-86f9-3d67bd04ab31" providerId="ADAL" clId="{518471B4-5DC5-4BFE-AC22-6696140998E6}" dt="2025-06-20T15:58:41.007" v="3717"/>
           <ac:spMkLst>
             <pc:docMk/>
             <pc:sldMk cId="0" sldId="261"/>
@@ -331,7 +336,7 @@
           </ac:spMkLst>
         </pc:spChg>
         <pc:spChg chg="mod">
-          <ac:chgData name="Myers, Chelsea" userId="f282533b-c263-466c-86f9-3d67bd04ab31" providerId="ADAL" clId="{518471B4-5DC5-4BFE-AC22-6696140998E6}" dt="2025-06-19T17:44:23.987" v="2496"/>
+          <ac:chgData name="Myers, Chelsea" userId="f282533b-c263-466c-86f9-3d67bd04ab31" providerId="ADAL" clId="{518471B4-5DC5-4BFE-AC22-6696140998E6}" dt="2025-06-20T15:58:41.007" v="3717"/>
           <ac:spMkLst>
             <pc:docMk/>
             <pc:sldMk cId="0" sldId="261"/>
@@ -363,13 +368,13 @@
         </pc:spChg>
       </pc:sldChg>
       <pc:sldChg chg="addSp modSp new mod ord">
-        <pc:chgData name="Myers, Chelsea" userId="f282533b-c263-466c-86f9-3d67bd04ab31" providerId="ADAL" clId="{518471B4-5DC5-4BFE-AC22-6696140998E6}" dt="2025-06-19T17:44:23.987" v="2496"/>
+        <pc:chgData name="Myers, Chelsea" userId="f282533b-c263-466c-86f9-3d67bd04ab31" providerId="ADAL" clId="{518471B4-5DC5-4BFE-AC22-6696140998E6}" dt="2025-06-20T15:58:41.007" v="3717"/>
         <pc:sldMkLst>
           <pc:docMk/>
           <pc:sldMk cId="3364173377" sldId="263"/>
         </pc:sldMkLst>
         <pc:spChg chg="mod">
-          <ac:chgData name="Myers, Chelsea" userId="f282533b-c263-466c-86f9-3d67bd04ab31" providerId="ADAL" clId="{518471B4-5DC5-4BFE-AC22-6696140998E6}" dt="2025-06-19T17:44:23.987" v="2496"/>
+          <ac:chgData name="Myers, Chelsea" userId="f282533b-c263-466c-86f9-3d67bd04ab31" providerId="ADAL" clId="{518471B4-5DC5-4BFE-AC22-6696140998E6}" dt="2025-06-20T15:58:41.007" v="3717"/>
           <ac:spMkLst>
             <pc:docMk/>
             <pc:sldMk cId="3364173377" sldId="263"/>
@@ -377,7 +382,7 @@
           </ac:spMkLst>
         </pc:spChg>
         <pc:spChg chg="mod">
-          <ac:chgData name="Myers, Chelsea" userId="f282533b-c263-466c-86f9-3d67bd04ab31" providerId="ADAL" clId="{518471B4-5DC5-4BFE-AC22-6696140998E6}" dt="2025-06-19T17:44:23.987" v="2496"/>
+          <ac:chgData name="Myers, Chelsea" userId="f282533b-c263-466c-86f9-3d67bd04ab31" providerId="ADAL" clId="{518471B4-5DC5-4BFE-AC22-6696140998E6}" dt="2025-06-20T15:58:41.007" v="3717"/>
           <ac:spMkLst>
             <pc:docMk/>
             <pc:sldMk cId="3364173377" sldId="263"/>
@@ -394,7 +399,7 @@
         </pc:graphicFrameChg>
       </pc:sldChg>
       <pc:sldChg chg="delSp modSp add mod">
-        <pc:chgData name="Myers, Chelsea" userId="f282533b-c263-466c-86f9-3d67bd04ab31" providerId="ADAL" clId="{518471B4-5DC5-4BFE-AC22-6696140998E6}" dt="2025-06-19T17:44:28.884" v="2497" actId="1076"/>
+        <pc:chgData name="Myers, Chelsea" userId="f282533b-c263-466c-86f9-3d67bd04ab31" providerId="ADAL" clId="{518471B4-5DC5-4BFE-AC22-6696140998E6}" dt="2025-06-20T15:58:41.007" v="3717"/>
         <pc:sldMkLst>
           <pc:docMk/>
           <pc:sldMk cId="3797113865" sldId="264"/>
@@ -408,7 +413,7 @@
           </ac:spMkLst>
         </pc:spChg>
         <pc:spChg chg="mod">
-          <ac:chgData name="Myers, Chelsea" userId="f282533b-c263-466c-86f9-3d67bd04ab31" providerId="ADAL" clId="{518471B4-5DC5-4BFE-AC22-6696140998E6}" dt="2025-06-19T17:44:23.987" v="2496"/>
+          <ac:chgData name="Myers, Chelsea" userId="f282533b-c263-466c-86f9-3d67bd04ab31" providerId="ADAL" clId="{518471B4-5DC5-4BFE-AC22-6696140998E6}" dt="2025-06-20T15:58:41.007" v="3717"/>
           <ac:spMkLst>
             <pc:docMk/>
             <pc:sldMk cId="3797113865" sldId="264"/>
@@ -433,13 +438,13 @@
         </pc:graphicFrameChg>
       </pc:sldChg>
       <pc:sldChg chg="modSp new mod">
-        <pc:chgData name="Myers, Chelsea" userId="f282533b-c263-466c-86f9-3d67bd04ab31" providerId="ADAL" clId="{518471B4-5DC5-4BFE-AC22-6696140998E6}" dt="2025-06-19T17:44:23.987" v="2496"/>
+        <pc:chgData name="Myers, Chelsea" userId="f282533b-c263-466c-86f9-3d67bd04ab31" providerId="ADAL" clId="{518471B4-5DC5-4BFE-AC22-6696140998E6}" dt="2025-06-20T15:58:41.007" v="3717"/>
         <pc:sldMkLst>
           <pc:docMk/>
           <pc:sldMk cId="766636857" sldId="265"/>
         </pc:sldMkLst>
         <pc:spChg chg="mod">
-          <ac:chgData name="Myers, Chelsea" userId="f282533b-c263-466c-86f9-3d67bd04ab31" providerId="ADAL" clId="{518471B4-5DC5-4BFE-AC22-6696140998E6}" dt="2025-06-19T17:44:23.987" v="2496"/>
+          <ac:chgData name="Myers, Chelsea" userId="f282533b-c263-466c-86f9-3d67bd04ab31" providerId="ADAL" clId="{518471B4-5DC5-4BFE-AC22-6696140998E6}" dt="2025-06-20T15:58:41.007" v="3717"/>
           <ac:spMkLst>
             <pc:docMk/>
             <pc:sldMk cId="766636857" sldId="265"/>
@@ -456,13 +461,13 @@
         </pc:spChg>
       </pc:sldChg>
       <pc:sldChg chg="modSp add mod">
-        <pc:chgData name="Myers, Chelsea" userId="f282533b-c263-466c-86f9-3d67bd04ab31" providerId="ADAL" clId="{518471B4-5DC5-4BFE-AC22-6696140998E6}" dt="2025-06-19T17:44:23.987" v="2496"/>
+        <pc:chgData name="Myers, Chelsea" userId="f282533b-c263-466c-86f9-3d67bd04ab31" providerId="ADAL" clId="{518471B4-5DC5-4BFE-AC22-6696140998E6}" dt="2025-06-20T15:58:41.007" v="3717"/>
         <pc:sldMkLst>
           <pc:docMk/>
           <pc:sldMk cId="2940259460" sldId="266"/>
         </pc:sldMkLst>
         <pc:spChg chg="mod">
-          <ac:chgData name="Myers, Chelsea" userId="f282533b-c263-466c-86f9-3d67bd04ab31" providerId="ADAL" clId="{518471B4-5DC5-4BFE-AC22-6696140998E6}" dt="2025-06-19T17:44:23.987" v="2496"/>
+          <ac:chgData name="Myers, Chelsea" userId="f282533b-c263-466c-86f9-3d67bd04ab31" providerId="ADAL" clId="{518471B4-5DC5-4BFE-AC22-6696140998E6}" dt="2025-06-20T15:58:41.007" v="3717"/>
           <ac:spMkLst>
             <pc:docMk/>
             <pc:sldMk cId="2940259460" sldId="266"/>
@@ -470,7 +475,7 @@
           </ac:spMkLst>
         </pc:spChg>
         <pc:spChg chg="mod">
-          <ac:chgData name="Myers, Chelsea" userId="f282533b-c263-466c-86f9-3d67bd04ab31" providerId="ADAL" clId="{518471B4-5DC5-4BFE-AC22-6696140998E6}" dt="2025-06-19T17:44:23.987" v="2496"/>
+          <ac:chgData name="Myers, Chelsea" userId="f282533b-c263-466c-86f9-3d67bd04ab31" providerId="ADAL" clId="{518471B4-5DC5-4BFE-AC22-6696140998E6}" dt="2025-06-20T15:58:41.007" v="3717"/>
           <ac:spMkLst>
             <pc:docMk/>
             <pc:sldMk cId="2940259460" sldId="266"/>
@@ -487,13 +492,13 @@
         </pc:graphicFrameChg>
       </pc:sldChg>
       <pc:sldChg chg="modSp add mod">
-        <pc:chgData name="Myers, Chelsea" userId="f282533b-c263-466c-86f9-3d67bd04ab31" providerId="ADAL" clId="{518471B4-5DC5-4BFE-AC22-6696140998E6}" dt="2025-06-19T17:44:23.987" v="2496"/>
+        <pc:chgData name="Myers, Chelsea" userId="f282533b-c263-466c-86f9-3d67bd04ab31" providerId="ADAL" clId="{518471B4-5DC5-4BFE-AC22-6696140998E6}" dt="2025-06-20T15:58:41.007" v="3717"/>
         <pc:sldMkLst>
           <pc:docMk/>
           <pc:sldMk cId="826445294" sldId="267"/>
         </pc:sldMkLst>
         <pc:spChg chg="mod">
-          <ac:chgData name="Myers, Chelsea" userId="f282533b-c263-466c-86f9-3d67bd04ab31" providerId="ADAL" clId="{518471B4-5DC5-4BFE-AC22-6696140998E6}" dt="2025-06-19T17:44:23.987" v="2496"/>
+          <ac:chgData name="Myers, Chelsea" userId="f282533b-c263-466c-86f9-3d67bd04ab31" providerId="ADAL" clId="{518471B4-5DC5-4BFE-AC22-6696140998E6}" dt="2025-06-20T15:58:41.007" v="3717"/>
           <ac:spMkLst>
             <pc:docMk/>
             <pc:sldMk cId="826445294" sldId="267"/>
@@ -501,7 +506,7 @@
           </ac:spMkLst>
         </pc:spChg>
         <pc:spChg chg="mod">
-          <ac:chgData name="Myers, Chelsea" userId="f282533b-c263-466c-86f9-3d67bd04ab31" providerId="ADAL" clId="{518471B4-5DC5-4BFE-AC22-6696140998E6}" dt="2025-06-19T17:44:23.987" v="2496"/>
+          <ac:chgData name="Myers, Chelsea" userId="f282533b-c263-466c-86f9-3d67bd04ab31" providerId="ADAL" clId="{518471B4-5DC5-4BFE-AC22-6696140998E6}" dt="2025-06-20T15:58:41.007" v="3717"/>
           <ac:spMkLst>
             <pc:docMk/>
             <pc:sldMk cId="826445294" sldId="267"/>
@@ -518,13 +523,13 @@
         </pc:graphicFrameChg>
       </pc:sldChg>
       <pc:sldChg chg="modSp add mod">
-        <pc:chgData name="Myers, Chelsea" userId="f282533b-c263-466c-86f9-3d67bd04ab31" providerId="ADAL" clId="{518471B4-5DC5-4BFE-AC22-6696140998E6}" dt="2025-06-19T17:44:23.987" v="2496"/>
+        <pc:chgData name="Myers, Chelsea" userId="f282533b-c263-466c-86f9-3d67bd04ab31" providerId="ADAL" clId="{518471B4-5DC5-4BFE-AC22-6696140998E6}" dt="2025-06-20T15:58:41.007" v="3717"/>
         <pc:sldMkLst>
           <pc:docMk/>
           <pc:sldMk cId="2372159742" sldId="268"/>
         </pc:sldMkLst>
         <pc:spChg chg="mod">
-          <ac:chgData name="Myers, Chelsea" userId="f282533b-c263-466c-86f9-3d67bd04ab31" providerId="ADAL" clId="{518471B4-5DC5-4BFE-AC22-6696140998E6}" dt="2025-06-19T17:44:23.987" v="2496"/>
+          <ac:chgData name="Myers, Chelsea" userId="f282533b-c263-466c-86f9-3d67bd04ab31" providerId="ADAL" clId="{518471B4-5DC5-4BFE-AC22-6696140998E6}" dt="2025-06-20T15:58:41.007" v="3717"/>
           <ac:spMkLst>
             <pc:docMk/>
             <pc:sldMk cId="2372159742" sldId="268"/>
@@ -532,7 +537,7 @@
           </ac:spMkLst>
         </pc:spChg>
         <pc:spChg chg="mod">
-          <ac:chgData name="Myers, Chelsea" userId="f282533b-c263-466c-86f9-3d67bd04ab31" providerId="ADAL" clId="{518471B4-5DC5-4BFE-AC22-6696140998E6}" dt="2025-06-19T17:44:23.987" v="2496"/>
+          <ac:chgData name="Myers, Chelsea" userId="f282533b-c263-466c-86f9-3d67bd04ab31" providerId="ADAL" clId="{518471B4-5DC5-4BFE-AC22-6696140998E6}" dt="2025-06-20T15:58:41.007" v="3717"/>
           <ac:spMkLst>
             <pc:docMk/>
             <pc:sldMk cId="2372159742" sldId="268"/>
@@ -549,13 +554,13 @@
         </pc:graphicFrameChg>
       </pc:sldChg>
       <pc:sldChg chg="modSp add mod">
-        <pc:chgData name="Myers, Chelsea" userId="f282533b-c263-466c-86f9-3d67bd04ab31" providerId="ADAL" clId="{518471B4-5DC5-4BFE-AC22-6696140998E6}" dt="2025-06-19T17:44:23.987" v="2496"/>
+        <pc:chgData name="Myers, Chelsea" userId="f282533b-c263-466c-86f9-3d67bd04ab31" providerId="ADAL" clId="{518471B4-5DC5-4BFE-AC22-6696140998E6}" dt="2025-06-20T15:58:41.007" v="3717"/>
         <pc:sldMkLst>
           <pc:docMk/>
           <pc:sldMk cId="150375314" sldId="269"/>
         </pc:sldMkLst>
         <pc:spChg chg="mod">
-          <ac:chgData name="Myers, Chelsea" userId="f282533b-c263-466c-86f9-3d67bd04ab31" providerId="ADAL" clId="{518471B4-5DC5-4BFE-AC22-6696140998E6}" dt="2025-06-19T17:44:23.987" v="2496"/>
+          <ac:chgData name="Myers, Chelsea" userId="f282533b-c263-466c-86f9-3d67bd04ab31" providerId="ADAL" clId="{518471B4-5DC5-4BFE-AC22-6696140998E6}" dt="2025-06-20T15:58:41.007" v="3717"/>
           <ac:spMkLst>
             <pc:docMk/>
             <pc:sldMk cId="150375314" sldId="269"/>
@@ -563,7 +568,7 @@
           </ac:spMkLst>
         </pc:spChg>
         <pc:spChg chg="mod">
-          <ac:chgData name="Myers, Chelsea" userId="f282533b-c263-466c-86f9-3d67bd04ab31" providerId="ADAL" clId="{518471B4-5DC5-4BFE-AC22-6696140998E6}" dt="2025-06-19T17:44:23.987" v="2496"/>
+          <ac:chgData name="Myers, Chelsea" userId="f282533b-c263-466c-86f9-3d67bd04ab31" providerId="ADAL" clId="{518471B4-5DC5-4BFE-AC22-6696140998E6}" dt="2025-06-20T15:58:41.007" v="3717"/>
           <ac:spMkLst>
             <pc:docMk/>
             <pc:sldMk cId="150375314" sldId="269"/>
@@ -572,13 +577,13 @@
         </pc:spChg>
       </pc:sldChg>
       <pc:sldChg chg="modSp add mod">
-        <pc:chgData name="Myers, Chelsea" userId="f282533b-c263-466c-86f9-3d67bd04ab31" providerId="ADAL" clId="{518471B4-5DC5-4BFE-AC22-6696140998E6}" dt="2025-06-19T17:44:23.987" v="2496"/>
+        <pc:chgData name="Myers, Chelsea" userId="f282533b-c263-466c-86f9-3d67bd04ab31" providerId="ADAL" clId="{518471B4-5DC5-4BFE-AC22-6696140998E6}" dt="2025-06-20T15:58:41.007" v="3717"/>
         <pc:sldMkLst>
           <pc:docMk/>
           <pc:sldMk cId="2358248639" sldId="270"/>
         </pc:sldMkLst>
         <pc:spChg chg="mod">
-          <ac:chgData name="Myers, Chelsea" userId="f282533b-c263-466c-86f9-3d67bd04ab31" providerId="ADAL" clId="{518471B4-5DC5-4BFE-AC22-6696140998E6}" dt="2025-06-19T17:44:23.987" v="2496"/>
+          <ac:chgData name="Myers, Chelsea" userId="f282533b-c263-466c-86f9-3d67bd04ab31" providerId="ADAL" clId="{518471B4-5DC5-4BFE-AC22-6696140998E6}" dt="2025-06-20T15:58:41.007" v="3717"/>
           <ac:spMkLst>
             <pc:docMk/>
             <pc:sldMk cId="2358248639" sldId="270"/>
@@ -586,7 +591,7 @@
           </ac:spMkLst>
         </pc:spChg>
         <pc:spChg chg="mod">
-          <ac:chgData name="Myers, Chelsea" userId="f282533b-c263-466c-86f9-3d67bd04ab31" providerId="ADAL" clId="{518471B4-5DC5-4BFE-AC22-6696140998E6}" dt="2025-06-19T17:44:23.987" v="2496"/>
+          <ac:chgData name="Myers, Chelsea" userId="f282533b-c263-466c-86f9-3d67bd04ab31" providerId="ADAL" clId="{518471B4-5DC5-4BFE-AC22-6696140998E6}" dt="2025-06-20T15:58:41.007" v="3717"/>
           <ac:spMkLst>
             <pc:docMk/>
             <pc:sldMk cId="2358248639" sldId="270"/>
@@ -595,13 +600,13 @@
         </pc:spChg>
       </pc:sldChg>
       <pc:sldChg chg="modSp add mod">
-        <pc:chgData name="Myers, Chelsea" userId="f282533b-c263-466c-86f9-3d67bd04ab31" providerId="ADAL" clId="{518471B4-5DC5-4BFE-AC22-6696140998E6}" dt="2025-06-19T17:44:23.987" v="2496"/>
+        <pc:chgData name="Myers, Chelsea" userId="f282533b-c263-466c-86f9-3d67bd04ab31" providerId="ADAL" clId="{518471B4-5DC5-4BFE-AC22-6696140998E6}" dt="2025-06-20T15:58:41.007" v="3717"/>
         <pc:sldMkLst>
           <pc:docMk/>
           <pc:sldMk cId="3158551559" sldId="271"/>
         </pc:sldMkLst>
         <pc:spChg chg="mod">
-          <ac:chgData name="Myers, Chelsea" userId="f282533b-c263-466c-86f9-3d67bd04ab31" providerId="ADAL" clId="{518471B4-5DC5-4BFE-AC22-6696140998E6}" dt="2025-06-19T17:44:23.987" v="2496"/>
+          <ac:chgData name="Myers, Chelsea" userId="f282533b-c263-466c-86f9-3d67bd04ab31" providerId="ADAL" clId="{518471B4-5DC5-4BFE-AC22-6696140998E6}" dt="2025-06-20T15:58:41.007" v="3717"/>
           <ac:spMkLst>
             <pc:docMk/>
             <pc:sldMk cId="3158551559" sldId="271"/>
@@ -609,7 +614,7 @@
           </ac:spMkLst>
         </pc:spChg>
         <pc:spChg chg="mod">
-          <ac:chgData name="Myers, Chelsea" userId="f282533b-c263-466c-86f9-3d67bd04ab31" providerId="ADAL" clId="{518471B4-5DC5-4BFE-AC22-6696140998E6}" dt="2025-06-19T17:44:23.987" v="2496"/>
+          <ac:chgData name="Myers, Chelsea" userId="f282533b-c263-466c-86f9-3d67bd04ab31" providerId="ADAL" clId="{518471B4-5DC5-4BFE-AC22-6696140998E6}" dt="2025-06-20T15:58:41.007" v="3717"/>
           <ac:spMkLst>
             <pc:docMk/>
             <pc:sldMk cId="3158551559" sldId="271"/>
@@ -657,13 +662,21 @@
         </pc:picChg>
       </pc:sldChg>
       <pc:sldChg chg="modSp add mod">
-        <pc:chgData name="Myers, Chelsea" userId="f282533b-c263-466c-86f9-3d67bd04ab31" providerId="ADAL" clId="{518471B4-5DC5-4BFE-AC22-6696140998E6}" dt="2025-06-19T22:39:29.451" v="2659" actId="113"/>
+        <pc:chgData name="Myers, Chelsea" userId="f282533b-c263-466c-86f9-3d67bd04ab31" providerId="ADAL" clId="{518471B4-5DC5-4BFE-AC22-6696140998E6}" dt="2025-06-20T15:58:41.007" v="3717"/>
         <pc:sldMkLst>
           <pc:docMk/>
           <pc:sldMk cId="0" sldId="273"/>
         </pc:sldMkLst>
         <pc:spChg chg="mod">
-          <ac:chgData name="Myers, Chelsea" userId="f282533b-c263-466c-86f9-3d67bd04ab31" providerId="ADAL" clId="{518471B4-5DC5-4BFE-AC22-6696140998E6}" dt="2025-06-19T22:39:29.451" v="2659" actId="113"/>
+          <ac:chgData name="Myers, Chelsea" userId="f282533b-c263-466c-86f9-3d67bd04ab31" providerId="ADAL" clId="{518471B4-5DC5-4BFE-AC22-6696140998E6}" dt="2025-06-20T15:58:41.007" v="3717"/>
+          <ac:spMkLst>
+            <pc:docMk/>
+            <pc:sldMk cId="0" sldId="273"/>
+            <ac:spMk id="2" creationId="{00000000-0000-0000-0000-000000000000}"/>
+          </ac:spMkLst>
+        </pc:spChg>
+        <pc:spChg chg="mod">
+          <ac:chgData name="Myers, Chelsea" userId="f282533b-c263-466c-86f9-3d67bd04ab31" providerId="ADAL" clId="{518471B4-5DC5-4BFE-AC22-6696140998E6}" dt="2025-06-20T15:58:41.007" v="3717"/>
           <ac:spMkLst>
             <pc:docMk/>
             <pc:sldMk cId="0" sldId="273"/>
@@ -672,13 +685,13 @@
         </pc:spChg>
       </pc:sldChg>
       <pc:sldChg chg="addSp modSp add mod setBg">
-        <pc:chgData name="Myers, Chelsea" userId="f282533b-c263-466c-86f9-3d67bd04ab31" providerId="ADAL" clId="{518471B4-5DC5-4BFE-AC22-6696140998E6}" dt="2025-06-19T22:40:07.728" v="2660" actId="26606"/>
+        <pc:chgData name="Myers, Chelsea" userId="f282533b-c263-466c-86f9-3d67bd04ab31" providerId="ADAL" clId="{518471B4-5DC5-4BFE-AC22-6696140998E6}" dt="2025-06-20T15:58:54.542" v="3718" actId="207"/>
         <pc:sldMkLst>
           <pc:docMk/>
           <pc:sldMk cId="0" sldId="274"/>
         </pc:sldMkLst>
         <pc:spChg chg="mod">
-          <ac:chgData name="Myers, Chelsea" userId="f282533b-c263-466c-86f9-3d67bd04ab31" providerId="ADAL" clId="{518471B4-5DC5-4BFE-AC22-6696140998E6}" dt="2025-06-19T22:40:07.728" v="2660" actId="26606"/>
+          <ac:chgData name="Myers, Chelsea" userId="f282533b-c263-466c-86f9-3d67bd04ab31" providerId="ADAL" clId="{518471B4-5DC5-4BFE-AC22-6696140998E6}" dt="2025-06-20T15:58:54.542" v="3718" actId="207"/>
           <ac:spMkLst>
             <pc:docMk/>
             <pc:sldMk cId="0" sldId="274"/>
@@ -703,13 +716,13 @@
         </pc:picChg>
       </pc:sldChg>
       <pc:sldChg chg="addSp modSp add mod setBg">
-        <pc:chgData name="Myers, Chelsea" userId="f282533b-c263-466c-86f9-3d67bd04ab31" providerId="ADAL" clId="{518471B4-5DC5-4BFE-AC22-6696140998E6}" dt="2025-06-19T22:40:16.673" v="2661" actId="26606"/>
+        <pc:chgData name="Myers, Chelsea" userId="f282533b-c263-466c-86f9-3d67bd04ab31" providerId="ADAL" clId="{518471B4-5DC5-4BFE-AC22-6696140998E6}" dt="2025-06-20T15:59:17.152" v="3719" actId="207"/>
         <pc:sldMkLst>
           <pc:docMk/>
           <pc:sldMk cId="0" sldId="275"/>
         </pc:sldMkLst>
         <pc:spChg chg="mod">
-          <ac:chgData name="Myers, Chelsea" userId="f282533b-c263-466c-86f9-3d67bd04ab31" providerId="ADAL" clId="{518471B4-5DC5-4BFE-AC22-6696140998E6}" dt="2025-06-19T22:40:16.673" v="2661" actId="26606"/>
+          <ac:chgData name="Myers, Chelsea" userId="f282533b-c263-466c-86f9-3d67bd04ab31" providerId="ADAL" clId="{518471B4-5DC5-4BFE-AC22-6696140998E6}" dt="2025-06-20T15:59:17.152" v="3719" actId="207"/>
           <ac:spMkLst>
             <pc:docMk/>
             <pc:sldMk cId="0" sldId="275"/>
@@ -734,13 +747,13 @@
         </pc:picChg>
       </pc:sldChg>
       <pc:sldChg chg="modSp add mod">
-        <pc:chgData name="Myers, Chelsea" userId="f282533b-c263-466c-86f9-3d67bd04ab31" providerId="ADAL" clId="{518471B4-5DC5-4BFE-AC22-6696140998E6}" dt="2025-06-19T22:53:16.816" v="3684" actId="20577"/>
+        <pc:chgData name="Myers, Chelsea" userId="f282533b-c263-466c-86f9-3d67bd04ab31" providerId="ADAL" clId="{518471B4-5DC5-4BFE-AC22-6696140998E6}" dt="2025-06-20T16:36:05.333" v="4631" actId="20577"/>
         <pc:sldMkLst>
           <pc:docMk/>
           <pc:sldMk cId="2016001821" sldId="276"/>
         </pc:sldMkLst>
         <pc:spChg chg="mod">
-          <ac:chgData name="Myers, Chelsea" userId="f282533b-c263-466c-86f9-3d67bd04ab31" providerId="ADAL" clId="{518471B4-5DC5-4BFE-AC22-6696140998E6}" dt="2025-06-19T22:53:16.816" v="3684" actId="20577"/>
+          <ac:chgData name="Myers, Chelsea" userId="f282533b-c263-466c-86f9-3d67bd04ab31" providerId="ADAL" clId="{518471B4-5DC5-4BFE-AC22-6696140998E6}" dt="2025-06-20T15:58:41.007" v="3717"/>
           <ac:spMkLst>
             <pc:docMk/>
             <pc:sldMk cId="2016001821" sldId="276"/>
@@ -748,7 +761,7 @@
           </ac:spMkLst>
         </pc:spChg>
         <pc:spChg chg="mod">
-          <ac:chgData name="Myers, Chelsea" userId="f282533b-c263-466c-86f9-3d67bd04ab31" providerId="ADAL" clId="{518471B4-5DC5-4BFE-AC22-6696140998E6}" dt="2025-06-19T22:47:05.072" v="3211" actId="20577"/>
+          <ac:chgData name="Myers, Chelsea" userId="f282533b-c263-466c-86f9-3d67bd04ab31" providerId="ADAL" clId="{518471B4-5DC5-4BFE-AC22-6696140998E6}" dt="2025-06-20T15:58:41.007" v="3717"/>
           <ac:spMkLst>
             <pc:docMk/>
             <pc:sldMk cId="2016001821" sldId="276"/>
@@ -756,7 +769,7 @@
           </ac:spMkLst>
         </pc:spChg>
         <pc:graphicFrameChg chg="mod modGraphic">
-          <ac:chgData name="Myers, Chelsea" userId="f282533b-c263-466c-86f9-3d67bd04ab31" providerId="ADAL" clId="{518471B4-5DC5-4BFE-AC22-6696140998E6}" dt="2025-06-19T22:50:05.235" v="3350" actId="122"/>
+          <ac:chgData name="Myers, Chelsea" userId="f282533b-c263-466c-86f9-3d67bd04ab31" providerId="ADAL" clId="{518471B4-5DC5-4BFE-AC22-6696140998E6}" dt="2025-06-20T16:36:05.333" v="4631" actId="20577"/>
           <ac:graphicFrameMkLst>
             <pc:docMk/>
             <pc:sldMk cId="2016001821" sldId="276"/>
@@ -765,13 +778,21 @@
         </pc:graphicFrameChg>
       </pc:sldChg>
       <pc:sldChg chg="modSp add mod">
-        <pc:chgData name="Myers, Chelsea" userId="f282533b-c263-466c-86f9-3d67bd04ab31" providerId="ADAL" clId="{518471B4-5DC5-4BFE-AC22-6696140998E6}" dt="2025-06-19T22:52:54.550" v="3680" actId="1076"/>
+        <pc:chgData name="Myers, Chelsea" userId="f282533b-c263-466c-86f9-3d67bd04ab31" providerId="ADAL" clId="{518471B4-5DC5-4BFE-AC22-6696140998E6}" dt="2025-06-20T16:01:24.589" v="3757" actId="20577"/>
         <pc:sldMkLst>
           <pc:docMk/>
           <pc:sldMk cId="1719917764" sldId="277"/>
         </pc:sldMkLst>
         <pc:spChg chg="mod">
-          <ac:chgData name="Myers, Chelsea" userId="f282533b-c263-466c-86f9-3d67bd04ab31" providerId="ADAL" clId="{518471B4-5DC5-4BFE-AC22-6696140998E6}" dt="2025-06-19T22:52:28.066" v="3628" actId="20577"/>
+          <ac:chgData name="Myers, Chelsea" userId="f282533b-c263-466c-86f9-3d67bd04ab31" providerId="ADAL" clId="{518471B4-5DC5-4BFE-AC22-6696140998E6}" dt="2025-06-20T16:00:34.136" v="3737" actId="1076"/>
+          <ac:spMkLst>
+            <pc:docMk/>
+            <pc:sldMk cId="1719917764" sldId="277"/>
+            <ac:spMk id="2" creationId="{AE80C070-8EAF-5668-150C-98AD4CF8435E}"/>
+          </ac:spMkLst>
+        </pc:spChg>
+        <pc:spChg chg="mod">
+          <ac:chgData name="Myers, Chelsea" userId="f282533b-c263-466c-86f9-3d67bd04ab31" providerId="ADAL" clId="{518471B4-5DC5-4BFE-AC22-6696140998E6}" dt="2025-06-20T15:58:41.007" v="3717"/>
           <ac:spMkLst>
             <pc:docMk/>
             <pc:sldMk cId="1719917764" sldId="277"/>
@@ -779,7 +800,7 @@
           </ac:spMkLst>
         </pc:spChg>
         <pc:graphicFrameChg chg="mod modGraphic">
-          <ac:chgData name="Myers, Chelsea" userId="f282533b-c263-466c-86f9-3d67bd04ab31" providerId="ADAL" clId="{518471B4-5DC5-4BFE-AC22-6696140998E6}" dt="2025-06-19T22:52:54.550" v="3680" actId="1076"/>
+          <ac:chgData name="Myers, Chelsea" userId="f282533b-c263-466c-86f9-3d67bd04ab31" providerId="ADAL" clId="{518471B4-5DC5-4BFE-AC22-6696140998E6}" dt="2025-06-20T16:01:24.589" v="3757" actId="20577"/>
           <ac:graphicFrameMkLst>
             <pc:docMk/>
             <pc:sldMk cId="1719917764" sldId="277"/>
@@ -788,13 +809,13 @@
         </pc:graphicFrameChg>
       </pc:sldChg>
       <pc:sldChg chg="modSp add mod ord">
-        <pc:chgData name="Myers, Chelsea" userId="f282533b-c263-466c-86f9-3d67bd04ab31" providerId="ADAL" clId="{518471B4-5DC5-4BFE-AC22-6696140998E6}" dt="2025-06-19T22:54:06.761" v="3716" actId="20577"/>
+        <pc:chgData name="Myers, Chelsea" userId="f282533b-c263-466c-86f9-3d67bd04ab31" providerId="ADAL" clId="{518471B4-5DC5-4BFE-AC22-6696140998E6}" dt="2025-06-20T16:30:58.234" v="4369" actId="20577"/>
         <pc:sldMkLst>
           <pc:docMk/>
           <pc:sldMk cId="3203151447" sldId="278"/>
         </pc:sldMkLst>
         <pc:spChg chg="mod">
-          <ac:chgData name="Myers, Chelsea" userId="f282533b-c263-466c-86f9-3d67bd04ab31" providerId="ADAL" clId="{518471B4-5DC5-4BFE-AC22-6696140998E6}" dt="2025-06-19T22:53:55.066" v="3708" actId="20577"/>
+          <ac:chgData name="Myers, Chelsea" userId="f282533b-c263-466c-86f9-3d67bd04ab31" providerId="ADAL" clId="{518471B4-5DC5-4BFE-AC22-6696140998E6}" dt="2025-06-20T16:30:46.673" v="4307" actId="20577"/>
           <ac:spMkLst>
             <pc:docMk/>
             <pc:sldMk cId="3203151447" sldId="278"/>
@@ -802,11 +823,173 @@
           </ac:spMkLst>
         </pc:spChg>
         <pc:spChg chg="mod">
-          <ac:chgData name="Myers, Chelsea" userId="f282533b-c263-466c-86f9-3d67bd04ab31" providerId="ADAL" clId="{518471B4-5DC5-4BFE-AC22-6696140998E6}" dt="2025-06-19T22:54:06.761" v="3716" actId="20577"/>
+          <ac:chgData name="Myers, Chelsea" userId="f282533b-c263-466c-86f9-3d67bd04ab31" providerId="ADAL" clId="{518471B4-5DC5-4BFE-AC22-6696140998E6}" dt="2025-06-20T16:30:58.234" v="4369" actId="20577"/>
           <ac:spMkLst>
             <pc:docMk/>
             <pc:sldMk cId="3203151447" sldId="278"/>
             <ac:spMk id="3" creationId="{F9AE6BB2-F41E-1537-6DDC-1072C26E702B}"/>
+          </ac:spMkLst>
+        </pc:spChg>
+      </pc:sldChg>
+      <pc:sldChg chg="addSp delSp modSp add mod">
+        <pc:chgData name="Myers, Chelsea" userId="f282533b-c263-466c-86f9-3d67bd04ab31" providerId="ADAL" clId="{518471B4-5DC5-4BFE-AC22-6696140998E6}" dt="2025-06-20T16:02:51.787" v="3785" actId="20577"/>
+        <pc:sldMkLst>
+          <pc:docMk/>
+          <pc:sldMk cId="1830195825" sldId="279"/>
+        </pc:sldMkLst>
+        <pc:graphicFrameChg chg="del">
+          <ac:chgData name="Myers, Chelsea" userId="f282533b-c263-466c-86f9-3d67bd04ab31" providerId="ADAL" clId="{518471B4-5DC5-4BFE-AC22-6696140998E6}" dt="2025-06-20T16:01:50.394" v="3759" actId="478"/>
+          <ac:graphicFrameMkLst>
+            <pc:docMk/>
+            <pc:sldMk cId="1830195825" sldId="279"/>
+            <ac:graphicFrameMk id="4" creationId="{48E54B3E-7468-CD4B-09E2-012258AAB0D2}"/>
+          </ac:graphicFrameMkLst>
+        </pc:graphicFrameChg>
+        <pc:graphicFrameChg chg="add mod modGraphic">
+          <ac:chgData name="Myers, Chelsea" userId="f282533b-c263-466c-86f9-3d67bd04ab31" providerId="ADAL" clId="{518471B4-5DC5-4BFE-AC22-6696140998E6}" dt="2025-06-20T16:02:51.787" v="3785" actId="20577"/>
+          <ac:graphicFrameMkLst>
+            <pc:docMk/>
+            <pc:sldMk cId="1830195825" sldId="279"/>
+            <ac:graphicFrameMk id="5" creationId="{BE9F7E89-9803-066B-4B2F-BB5DD5EA9E8A}"/>
+          </ac:graphicFrameMkLst>
+        </pc:graphicFrameChg>
+      </pc:sldChg>
+      <pc:sldChg chg="addSp delSp modSp add del mod chgLayout">
+        <pc:chgData name="Myers, Chelsea" userId="f282533b-c263-466c-86f9-3d67bd04ab31" providerId="ADAL" clId="{518471B4-5DC5-4BFE-AC22-6696140998E6}" dt="2025-06-20T16:08:18.802" v="3920" actId="2696"/>
+        <pc:sldMkLst>
+          <pc:docMk/>
+          <pc:sldMk cId="3726058829" sldId="280"/>
+        </pc:sldMkLst>
+        <pc:spChg chg="mod ord">
+          <ac:chgData name="Myers, Chelsea" userId="f282533b-c263-466c-86f9-3d67bd04ab31" providerId="ADAL" clId="{518471B4-5DC5-4BFE-AC22-6696140998E6}" dt="2025-06-20T16:05:56.471" v="3788" actId="700"/>
+          <ac:spMkLst>
+            <pc:docMk/>
+            <pc:sldMk cId="3726058829" sldId="280"/>
+            <ac:spMk id="2" creationId="{563A7387-E020-AABD-7B44-018D161AC36E}"/>
+          </ac:spMkLst>
+        </pc:spChg>
+        <pc:spChg chg="mod ord">
+          <ac:chgData name="Myers, Chelsea" userId="f282533b-c263-466c-86f9-3d67bd04ab31" providerId="ADAL" clId="{518471B4-5DC5-4BFE-AC22-6696140998E6}" dt="2025-06-20T16:05:56.471" v="3788" actId="700"/>
+          <ac:spMkLst>
+            <pc:docMk/>
+            <pc:sldMk cId="3726058829" sldId="280"/>
+            <ac:spMk id="3" creationId="{2C342CAB-5C59-FAB0-C281-E9EB25853E90}"/>
+          </ac:spMkLst>
+        </pc:spChg>
+        <pc:spChg chg="add del">
+          <ac:chgData name="Myers, Chelsea" userId="f282533b-c263-466c-86f9-3d67bd04ab31" providerId="ADAL" clId="{518471B4-5DC5-4BFE-AC22-6696140998E6}" dt="2025-06-20T16:06:06.407" v="3790" actId="22"/>
+          <ac:spMkLst>
+            <pc:docMk/>
+            <pc:sldMk cId="3726058829" sldId="280"/>
+            <ac:spMk id="6" creationId="{5317EEB0-F8BB-B66B-B912-AF10C9E9F7EB}"/>
+          </ac:spMkLst>
+        </pc:spChg>
+        <pc:graphicFrameChg chg="del">
+          <ac:chgData name="Myers, Chelsea" userId="f282533b-c263-466c-86f9-3d67bd04ab31" providerId="ADAL" clId="{518471B4-5DC5-4BFE-AC22-6696140998E6}" dt="2025-06-20T16:05:18.769" v="3787" actId="478"/>
+          <ac:graphicFrameMkLst>
+            <pc:docMk/>
+            <pc:sldMk cId="3726058829" sldId="280"/>
+            <ac:graphicFrameMk id="5" creationId="{8A2B817F-3433-7277-2E0E-A0F30EB21422}"/>
+          </ac:graphicFrameMkLst>
+        </pc:graphicFrameChg>
+      </pc:sldChg>
+      <pc:sldChg chg="modSp add mod ord">
+        <pc:chgData name="Myers, Chelsea" userId="f282533b-c263-466c-86f9-3d67bd04ab31" providerId="ADAL" clId="{518471B4-5DC5-4BFE-AC22-6696140998E6}" dt="2025-06-20T16:08:10.991" v="3919" actId="5793"/>
+        <pc:sldMkLst>
+          <pc:docMk/>
+          <pc:sldMk cId="653985383" sldId="281"/>
+        </pc:sldMkLst>
+        <pc:spChg chg="mod">
+          <ac:chgData name="Myers, Chelsea" userId="f282533b-c263-466c-86f9-3d67bd04ab31" providerId="ADAL" clId="{518471B4-5DC5-4BFE-AC22-6696140998E6}" dt="2025-06-20T16:08:10.991" v="3919" actId="5793"/>
+          <ac:spMkLst>
+            <pc:docMk/>
+            <pc:sldMk cId="653985383" sldId="281"/>
+            <ac:spMk id="3" creationId="{A2A75406-C5CC-D7B4-0FDA-AE4EEFE9AB76}"/>
+          </ac:spMkLst>
+        </pc:spChg>
+      </pc:sldChg>
+      <pc:sldChg chg="addSp delSp modSp add mod">
+        <pc:chgData name="Myers, Chelsea" userId="f282533b-c263-466c-86f9-3d67bd04ab31" providerId="ADAL" clId="{518471B4-5DC5-4BFE-AC22-6696140998E6}" dt="2025-06-20T16:30:39.991" v="4293" actId="20577"/>
+        <pc:sldMkLst>
+          <pc:docMk/>
+          <pc:sldMk cId="442059930" sldId="282"/>
+        </pc:sldMkLst>
+        <pc:spChg chg="mod">
+          <ac:chgData name="Myers, Chelsea" userId="f282533b-c263-466c-86f9-3d67bd04ab31" providerId="ADAL" clId="{518471B4-5DC5-4BFE-AC22-6696140998E6}" dt="2025-06-20T16:30:39.991" v="4293" actId="20577"/>
+          <ac:spMkLst>
+            <pc:docMk/>
+            <pc:sldMk cId="442059930" sldId="282"/>
+            <ac:spMk id="2" creationId="{EA173FE9-5C2A-26ED-7110-2B6524A96CA1}"/>
+          </ac:spMkLst>
+        </pc:spChg>
+        <pc:spChg chg="del">
+          <ac:chgData name="Myers, Chelsea" userId="f282533b-c263-466c-86f9-3d67bd04ab31" providerId="ADAL" clId="{518471B4-5DC5-4BFE-AC22-6696140998E6}" dt="2025-06-20T16:26:52.592" v="4120" actId="478"/>
+          <ac:spMkLst>
+            <pc:docMk/>
+            <pc:sldMk cId="442059930" sldId="282"/>
+            <ac:spMk id="3" creationId="{F77CF72D-A485-E31C-A16C-F5D0B3EB092C}"/>
+          </ac:spMkLst>
+        </pc:spChg>
+        <pc:spChg chg="add mod">
+          <ac:chgData name="Myers, Chelsea" userId="f282533b-c263-466c-86f9-3d67bd04ab31" providerId="ADAL" clId="{518471B4-5DC5-4BFE-AC22-6696140998E6}" dt="2025-06-20T16:26:52.592" v="4120" actId="478"/>
+          <ac:spMkLst>
+            <pc:docMk/>
+            <pc:sldMk cId="442059930" sldId="282"/>
+            <ac:spMk id="5" creationId="{A352918E-2801-610E-5021-7505AC2E7167}"/>
+          </ac:spMkLst>
+        </pc:spChg>
+        <pc:graphicFrameChg chg="add mod modGraphic">
+          <ac:chgData name="Myers, Chelsea" userId="f282533b-c263-466c-86f9-3d67bd04ab31" providerId="ADAL" clId="{518471B4-5DC5-4BFE-AC22-6696140998E6}" dt="2025-06-20T16:29:29.737" v="4279" actId="20577"/>
+          <ac:graphicFrameMkLst>
+            <pc:docMk/>
+            <pc:sldMk cId="442059930" sldId="282"/>
+            <ac:graphicFrameMk id="6" creationId="{922F7FBA-A062-0756-E36E-B026A71479D9}"/>
+          </ac:graphicFrameMkLst>
+        </pc:graphicFrameChg>
+      </pc:sldChg>
+      <pc:sldChg chg="modSp add mod">
+        <pc:chgData name="Myers, Chelsea" userId="f282533b-c263-466c-86f9-3d67bd04ab31" providerId="ADAL" clId="{518471B4-5DC5-4BFE-AC22-6696140998E6}" dt="2025-06-20T16:32:55.201" v="4476" actId="20577"/>
+        <pc:sldMkLst>
+          <pc:docMk/>
+          <pc:sldMk cId="4011153851" sldId="283"/>
+        </pc:sldMkLst>
+        <pc:spChg chg="mod">
+          <ac:chgData name="Myers, Chelsea" userId="f282533b-c263-466c-86f9-3d67bd04ab31" providerId="ADAL" clId="{518471B4-5DC5-4BFE-AC22-6696140998E6}" dt="2025-06-20T16:31:56.364" v="4401" actId="20577"/>
+          <ac:spMkLst>
+            <pc:docMk/>
+            <pc:sldMk cId="4011153851" sldId="283"/>
+            <ac:spMk id="2" creationId="{F7D40F85-34A4-19EA-70D2-B8D2832E7F82}"/>
+          </ac:spMkLst>
+        </pc:spChg>
+        <pc:spChg chg="mod">
+          <ac:chgData name="Myers, Chelsea" userId="f282533b-c263-466c-86f9-3d67bd04ab31" providerId="ADAL" clId="{518471B4-5DC5-4BFE-AC22-6696140998E6}" dt="2025-06-20T16:32:55.201" v="4476" actId="20577"/>
+          <ac:spMkLst>
+            <pc:docMk/>
+            <pc:sldMk cId="4011153851" sldId="283"/>
+            <ac:spMk id="3" creationId="{FAA238BD-459E-C712-A37C-6F3BFFD2C6DE}"/>
+          </ac:spMkLst>
+        </pc:spChg>
+      </pc:sldChg>
+      <pc:sldChg chg="modSp add mod">
+        <pc:chgData name="Myers, Chelsea" userId="f282533b-c263-466c-86f9-3d67bd04ab31" providerId="ADAL" clId="{518471B4-5DC5-4BFE-AC22-6696140998E6}" dt="2025-06-20T16:38:01.905" v="4706" actId="20577"/>
+        <pc:sldMkLst>
+          <pc:docMk/>
+          <pc:sldMk cId="1349712774" sldId="284"/>
+        </pc:sldMkLst>
+        <pc:spChg chg="mod">
+          <ac:chgData name="Myers, Chelsea" userId="f282533b-c263-466c-86f9-3d67bd04ab31" providerId="ADAL" clId="{518471B4-5DC5-4BFE-AC22-6696140998E6}" dt="2025-06-20T16:33:35.239" v="4513" actId="20577"/>
+          <ac:spMkLst>
+            <pc:docMk/>
+            <pc:sldMk cId="1349712774" sldId="284"/>
+            <ac:spMk id="2" creationId="{C0875434-48A6-F8CE-78E6-5D183AA1381F}"/>
+          </ac:spMkLst>
+        </pc:spChg>
+        <pc:spChg chg="mod">
+          <ac:chgData name="Myers, Chelsea" userId="f282533b-c263-466c-86f9-3d67bd04ab31" providerId="ADAL" clId="{518471B4-5DC5-4BFE-AC22-6696140998E6}" dt="2025-06-20T16:38:01.905" v="4706" actId="20577"/>
+          <ac:spMkLst>
+            <pc:docMk/>
+            <pc:sldMk cId="1349712774" sldId="284"/>
+            <ac:spMk id="3" creationId="{38C69DD6-6CEB-6622-224B-09720EB3487C}"/>
           </ac:spMkLst>
         </pc:spChg>
       </pc:sldChg>
@@ -1015,7 +1198,7 @@
           <a:p>
             <a:fld id="{5BCAD085-E8A6-8845-BD4E-CB4CCA059FC4}" type="datetimeFigureOut">
               <a:rPr lang="en-US" smtClean="0"/>
-              <a:t>6/18/2025</a:t>
+              <a:t>6/20/2025</a:t>
             </a:fld>
             <a:endParaRPr lang="en-US"/>
           </a:p>
@@ -1205,7 +1388,7 @@
           <a:p>
             <a:fld id="{5BCAD085-E8A6-8845-BD4E-CB4CCA059FC4}" type="datetimeFigureOut">
               <a:rPr lang="en-US" smtClean="0"/>
-              <a:t>6/18/2025</a:t>
+              <a:t>6/20/2025</a:t>
             </a:fld>
             <a:endParaRPr lang="en-US"/>
           </a:p>
@@ -1385,7 +1568,7 @@
           <a:p>
             <a:fld id="{5BCAD085-E8A6-8845-BD4E-CB4CCA059FC4}" type="datetimeFigureOut">
               <a:rPr lang="en-US" smtClean="0"/>
-              <a:t>6/18/2025</a:t>
+              <a:t>6/20/2025</a:t>
             </a:fld>
             <a:endParaRPr lang="en-US"/>
           </a:p>
@@ -1555,7 +1738,7 @@
           <a:p>
             <a:fld id="{5BCAD085-E8A6-8845-BD4E-CB4CCA059FC4}" type="datetimeFigureOut">
               <a:rPr lang="en-US" smtClean="0"/>
-              <a:t>6/18/2025</a:t>
+              <a:t>6/20/2025</a:t>
             </a:fld>
             <a:endParaRPr lang="en-US"/>
           </a:p>
@@ -1811,7 +1994,7 @@
           <a:p>
             <a:fld id="{5BCAD085-E8A6-8845-BD4E-CB4CCA059FC4}" type="datetimeFigureOut">
               <a:rPr lang="en-US" smtClean="0"/>
-              <a:t>6/18/2025</a:t>
+              <a:t>6/20/2025</a:t>
             </a:fld>
             <a:endParaRPr lang="en-US"/>
           </a:p>
@@ -2099,7 +2282,7 @@
           <a:p>
             <a:fld id="{5BCAD085-E8A6-8845-BD4E-CB4CCA059FC4}" type="datetimeFigureOut">
               <a:rPr lang="en-US" smtClean="0"/>
-              <a:t>6/18/2025</a:t>
+              <a:t>6/20/2025</a:t>
             </a:fld>
             <a:endParaRPr lang="en-US"/>
           </a:p>
@@ -2537,7 +2720,7 @@
           <a:p>
             <a:fld id="{5BCAD085-E8A6-8845-BD4E-CB4CCA059FC4}" type="datetimeFigureOut">
               <a:rPr lang="en-US" smtClean="0"/>
-              <a:t>6/18/2025</a:t>
+              <a:t>6/20/2025</a:t>
             </a:fld>
             <a:endParaRPr lang="en-US"/>
           </a:p>
@@ -2655,7 +2838,7 @@
           <a:p>
             <a:fld id="{5BCAD085-E8A6-8845-BD4E-CB4CCA059FC4}" type="datetimeFigureOut">
               <a:rPr lang="en-US" smtClean="0"/>
-              <a:t>6/18/2025</a:t>
+              <a:t>6/20/2025</a:t>
             </a:fld>
             <a:endParaRPr lang="en-US"/>
           </a:p>
@@ -2750,7 +2933,7 @@
           <a:p>
             <a:fld id="{5BCAD085-E8A6-8845-BD4E-CB4CCA059FC4}" type="datetimeFigureOut">
               <a:rPr lang="en-US" smtClean="0"/>
-              <a:t>6/18/2025</a:t>
+              <a:t>6/20/2025</a:t>
             </a:fld>
             <a:endParaRPr lang="en-US"/>
           </a:p>
@@ -3106,7 +3289,7 @@
           <a:p>
             <a:fld id="{5BCAD085-E8A6-8845-BD4E-CB4CCA059FC4}" type="datetimeFigureOut">
               <a:rPr lang="en-US" smtClean="0"/>
-              <a:t>6/18/2025</a:t>
+              <a:t>6/20/2025</a:t>
             </a:fld>
             <a:endParaRPr lang="en-US"/>
           </a:p>
@@ -3425,7 +3608,7 @@
           <a:p>
             <a:fld id="{5BCAD085-E8A6-8845-BD4E-CB4CCA059FC4}" type="datetimeFigureOut">
               <a:rPr lang="en-US" smtClean="0"/>
-              <a:t>6/18/2025</a:t>
+              <a:t>6/20/2025</a:t>
             </a:fld>
             <a:endParaRPr lang="en-US"/>
           </a:p>
@@ -3658,7 +3841,7 @@
           <a:p>
             <a:fld id="{5BCAD085-E8A6-8845-BD4E-CB4CCA059FC4}" type="datetimeFigureOut">
               <a:rPr lang="en-US" smtClean="0"/>
-              <a:t>6/18/2025</a:t>
+              <a:t>6/20/2025</a:t>
             </a:fld>
             <a:endParaRPr lang="en-US"/>
           </a:p>
@@ -4158,6 +4341,1004 @@
   <p:cSld>
     <p:spTree>
       <p:nvGrpSpPr>
+        <p:cNvPr id="1" name="">
+          <a:extLst>
+            <a:ext uri="{FF2B5EF4-FFF2-40B4-BE49-F238E27FC236}">
+              <a16:creationId xmlns:a16="http://schemas.microsoft.com/office/drawing/2014/main" id="{3ABDC6F5-9954-BE95-FD95-4C66A1548B7B}"/>
+            </a:ext>
+          </a:extLst>
+        </p:cNvPr>
+        <p:cNvGrpSpPr/>
+        <p:nvPr/>
+      </p:nvGrpSpPr>
+      <p:grpSpPr>
+        <a:xfrm>
+          <a:off x="0" y="0"/>
+          <a:ext cx="0" cy="0"/>
+          <a:chOff x="0" y="0"/>
+          <a:chExt cx="0" cy="0"/>
+        </a:xfrm>
+      </p:grpSpPr>
+      <p:sp>
+        <p:nvSpPr>
+          <p:cNvPr id="2" name="Title 1">
+            <a:extLst>
+              <a:ext uri="{FF2B5EF4-FFF2-40B4-BE49-F238E27FC236}">
+                <a16:creationId xmlns:a16="http://schemas.microsoft.com/office/drawing/2014/main" id="{4E1B4B84-A660-6AD3-68CD-D26D1B2F17C5}"/>
+              </a:ext>
+            </a:extLst>
+          </p:cNvPr>
+          <p:cNvSpPr>
+            <a:spLocks noGrp="1"/>
+          </p:cNvSpPr>
+          <p:nvPr>
+            <p:ph type="title"/>
+          </p:nvPr>
+        </p:nvSpPr>
+        <p:spPr/>
+        <p:txBody>
+          <a:bodyPr/>
+          <a:lstStyle/>
+          <a:p>
+            <a:r>
+              <a:rPr lang="en-US" dirty="0"/>
+              <a:t>Single-Factor ANOVA</a:t>
+            </a:r>
+            <a:endParaRPr dirty="0"/>
+          </a:p>
+        </p:txBody>
+      </p:sp>
+      <p:sp>
+        <p:nvSpPr>
+          <p:cNvPr id="3" name="Content Placeholder 2">
+            <a:extLst>
+              <a:ext uri="{FF2B5EF4-FFF2-40B4-BE49-F238E27FC236}">
+                <a16:creationId xmlns:a16="http://schemas.microsoft.com/office/drawing/2014/main" id="{F9AE6BB2-F41E-1537-6DDC-1072C26E702B}"/>
+              </a:ext>
+            </a:extLst>
+          </p:cNvPr>
+          <p:cNvSpPr>
+            <a:spLocks noGrp="1"/>
+          </p:cNvSpPr>
+          <p:nvPr>
+            <p:ph idx="1"/>
+          </p:nvPr>
+        </p:nvSpPr>
+        <p:spPr/>
+        <p:txBody>
+          <a:bodyPr/>
+          <a:lstStyle/>
+          <a:p>
+            <a:pPr marL="342900" lvl="1">
+              <a:buFont typeface="Arial" panose="020B0604020202020204" pitchFamily="34" charset="0"/>
+              <a:buChar char="•"/>
+            </a:pPr>
+            <a:r>
+              <a:rPr dirty="0"/>
+              <a:t>Compare means of</a:t>
+            </a:r>
+            <a:r>
+              <a:rPr lang="en-US" dirty="0"/>
+              <a:t> </a:t>
+            </a:r>
+            <a:r>
+              <a:rPr lang="en-US" b="1" dirty="0"/>
+              <a:t>more than</a:t>
+            </a:r>
+            <a:r>
+              <a:rPr b="1" dirty="0"/>
+              <a:t> two </a:t>
+            </a:r>
+            <a:r>
+              <a:rPr dirty="0"/>
+              <a:t>independent groups</a:t>
+            </a:r>
+            <a:endParaRPr lang="en-US" dirty="0"/>
+          </a:p>
+          <a:p>
+            <a:pPr marL="342900" lvl="1">
+              <a:buFont typeface="Arial" panose="020B0604020202020204" pitchFamily="34" charset="0"/>
+              <a:buChar char="•"/>
+            </a:pPr>
+            <a:r>
+              <a:rPr lang="en-US" dirty="0"/>
+              <a:t>Single-factor because we are only testing one thing</a:t>
+            </a:r>
+          </a:p>
+          <a:p>
+            <a:pPr marL="342900" lvl="1">
+              <a:buFont typeface="Arial" panose="020B0604020202020204" pitchFamily="34" charset="0"/>
+              <a:buChar char="•"/>
+            </a:pPr>
+            <a:r>
+              <a:rPr lang="en-US" dirty="0"/>
+              <a:t>Test three different text to speech models to see if they differ in accuracy</a:t>
+            </a:r>
+          </a:p>
+          <a:p>
+            <a:pPr marL="342900" lvl="1">
+              <a:buFont typeface="Arial" panose="020B0604020202020204" pitchFamily="34" charset="0"/>
+              <a:buChar char="•"/>
+            </a:pPr>
+            <a:r>
+              <a:rPr lang="en-US" b="1" dirty="0"/>
+              <a:t>Null hypothesis (Ho): </a:t>
+            </a:r>
+            <a:r>
+              <a:rPr lang="en-US" dirty="0"/>
+              <a:t>The accuracy for all three models is the same</a:t>
+            </a:r>
+          </a:p>
+          <a:p>
+            <a:pPr marL="342900" lvl="1">
+              <a:buFont typeface="Arial" panose="020B0604020202020204" pitchFamily="34" charset="0"/>
+              <a:buChar char="•"/>
+            </a:pPr>
+            <a:r>
+              <a:rPr lang="en-US" b="1" dirty="0"/>
+              <a:t>Alternative hypothesis (Ha): </a:t>
+            </a:r>
+            <a:r>
+              <a:rPr lang="en-US" dirty="0"/>
+              <a:t>The accuracy of at least one model is different</a:t>
+            </a:r>
+            <a:endParaRPr dirty="0"/>
+          </a:p>
+        </p:txBody>
+      </p:sp>
+    </p:spTree>
+    <p:extLst>
+      <p:ext uri="{BB962C8B-B14F-4D97-AF65-F5344CB8AC3E}">
+        <p14:creationId xmlns:p14="http://schemas.microsoft.com/office/powerpoint/2010/main" val="3203151447"/>
+      </p:ext>
+    </p:extLst>
+  </p:cSld>
+  <p:clrMapOvr>
+    <a:masterClrMapping/>
+  </p:clrMapOvr>
+</p:sld>
+</file>
+
+<file path=ppt/slides/slide11.xml><?xml version="1.0" encoding="utf-8"?>
+<p:sld xmlns:a="http://schemas.openxmlformats.org/drawingml/2006/main" xmlns:r="http://schemas.openxmlformats.org/officeDocument/2006/relationships" xmlns:p="http://schemas.openxmlformats.org/presentationml/2006/main">
+  <p:cSld>
+    <p:spTree>
+      <p:nvGrpSpPr>
+        <p:cNvPr id="1" name="">
+          <a:extLst>
+            <a:ext uri="{FF2B5EF4-FFF2-40B4-BE49-F238E27FC236}">
+              <a16:creationId xmlns:a16="http://schemas.microsoft.com/office/drawing/2014/main" id="{8167F597-8749-0001-4B2F-A7975D7C53DA}"/>
+            </a:ext>
+          </a:extLst>
+        </p:cNvPr>
+        <p:cNvGrpSpPr/>
+        <p:nvPr/>
+      </p:nvGrpSpPr>
+      <p:grpSpPr>
+        <a:xfrm>
+          <a:off x="0" y="0"/>
+          <a:ext cx="0" cy="0"/>
+          <a:chOff x="0" y="0"/>
+          <a:chExt cx="0" cy="0"/>
+        </a:xfrm>
+      </p:grpSpPr>
+      <p:sp>
+        <p:nvSpPr>
+          <p:cNvPr id="2" name="Title 1">
+            <a:extLst>
+              <a:ext uri="{FF2B5EF4-FFF2-40B4-BE49-F238E27FC236}">
+                <a16:creationId xmlns:a16="http://schemas.microsoft.com/office/drawing/2014/main" id="{EA173FE9-5C2A-26ED-7110-2B6524A96CA1}"/>
+              </a:ext>
+            </a:extLst>
+          </p:cNvPr>
+          <p:cNvSpPr>
+            <a:spLocks noGrp="1"/>
+          </p:cNvSpPr>
+          <p:nvPr>
+            <p:ph type="title"/>
+          </p:nvPr>
+        </p:nvSpPr>
+        <p:spPr/>
+        <p:txBody>
+          <a:bodyPr/>
+          <a:lstStyle/>
+          <a:p>
+            <a:r>
+              <a:rPr lang="en-US" dirty="0"/>
+              <a:t>Single-Factor ANOVA</a:t>
+            </a:r>
+            <a:endParaRPr dirty="0"/>
+          </a:p>
+        </p:txBody>
+      </p:sp>
+      <p:sp>
+        <p:nvSpPr>
+          <p:cNvPr id="5" name="Content Placeholder 4">
+            <a:extLst>
+              <a:ext uri="{FF2B5EF4-FFF2-40B4-BE49-F238E27FC236}">
+                <a16:creationId xmlns:a16="http://schemas.microsoft.com/office/drawing/2014/main" id="{A352918E-2801-610E-5021-7505AC2E7167}"/>
+              </a:ext>
+            </a:extLst>
+          </p:cNvPr>
+          <p:cNvSpPr>
+            <a:spLocks noGrp="1"/>
+          </p:cNvSpPr>
+          <p:nvPr>
+            <p:ph idx="1"/>
+          </p:nvPr>
+        </p:nvSpPr>
+        <p:spPr/>
+        <p:txBody>
+          <a:bodyPr/>
+          <a:lstStyle/>
+          <a:p>
+            <a:endParaRPr lang="en-US"/>
+          </a:p>
+        </p:txBody>
+      </p:sp>
+      <p:graphicFrame>
+        <p:nvGraphicFramePr>
+          <p:cNvPr id="6" name="Table 5">
+            <a:extLst>
+              <a:ext uri="{FF2B5EF4-FFF2-40B4-BE49-F238E27FC236}">
+                <a16:creationId xmlns:a16="http://schemas.microsoft.com/office/drawing/2014/main" id="{922F7FBA-A062-0756-E36E-B026A71479D9}"/>
+              </a:ext>
+            </a:extLst>
+          </p:cNvPr>
+          <p:cNvGraphicFramePr>
+            <a:graphicFrameLocks noGrp="1"/>
+          </p:cNvGraphicFramePr>
+          <p:nvPr>
+            <p:extLst>
+              <p:ext uri="{D42A27DB-BD31-4B8C-83A1-F6EECF244321}">
+                <p14:modId xmlns:p14="http://schemas.microsoft.com/office/powerpoint/2010/main" val="1240379812"/>
+              </p:ext>
+            </p:extLst>
+          </p:nvPr>
+        </p:nvGraphicFramePr>
+        <p:xfrm>
+          <a:off x="2094309" y="2015799"/>
+          <a:ext cx="4876800" cy="4297680"/>
+        </p:xfrm>
+        <a:graphic>
+          <a:graphicData uri="http://schemas.openxmlformats.org/drawingml/2006/table">
+            <a:tbl>
+              <a:tblPr firstRow="1" bandRow="1">
+                <a:tableStyleId>{5C22544A-7EE6-4342-B048-85BDC9FD1C3A}</a:tableStyleId>
+              </a:tblPr>
+              <a:tblGrid>
+                <a:gridCol w="1625600">
+                  <a:extLst>
+                    <a:ext uri="{9D8B030D-6E8A-4147-A177-3AD203B41FA5}">
+                      <a16:colId xmlns:a16="http://schemas.microsoft.com/office/drawing/2014/main" val="20001"/>
+                    </a:ext>
+                  </a:extLst>
+                </a:gridCol>
+                <a:gridCol w="1625600">
+                  <a:extLst>
+                    <a:ext uri="{9D8B030D-6E8A-4147-A177-3AD203B41FA5}">
+                      <a16:colId xmlns:a16="http://schemas.microsoft.com/office/drawing/2014/main" val="20002"/>
+                    </a:ext>
+                  </a:extLst>
+                </a:gridCol>
+                <a:gridCol w="1625600">
+                  <a:extLst>
+                    <a:ext uri="{9D8B030D-6E8A-4147-A177-3AD203B41FA5}">
+                      <a16:colId xmlns:a16="http://schemas.microsoft.com/office/drawing/2014/main" val="3452997314"/>
+                    </a:ext>
+                  </a:extLst>
+                </a:gridCol>
+              </a:tblGrid>
+              <a:tr h="304800">
+                <a:tc>
+                  <a:txBody>
+                    <a:bodyPr/>
+                    <a:lstStyle/>
+                    <a:p>
+                      <a:pPr algn="ctr"/>
+                      <a:r>
+                        <a:rPr lang="en-US" dirty="0"/>
+                        <a:t>Model 1 Accuracy</a:t>
+                      </a:r>
+                      <a:endParaRPr dirty="0"/>
+                    </a:p>
+                  </a:txBody>
+                  <a:tcPr/>
+                </a:tc>
+                <a:tc>
+                  <a:txBody>
+                    <a:bodyPr/>
+                    <a:lstStyle/>
+                    <a:p>
+                      <a:pPr algn="ctr"/>
+                      <a:r>
+                        <a:rPr lang="en-US" dirty="0"/>
+                        <a:t>Model 2 Accuracy</a:t>
+                      </a:r>
+                      <a:endParaRPr dirty="0"/>
+                    </a:p>
+                  </a:txBody>
+                  <a:tcPr/>
+                </a:tc>
+                <a:tc>
+                  <a:txBody>
+                    <a:bodyPr/>
+                    <a:lstStyle/>
+                    <a:p>
+                      <a:pPr algn="ctr"/>
+                      <a:r>
+                        <a:rPr lang="en-US" dirty="0"/>
+                        <a:t>Model 3 Accuracy</a:t>
+                      </a:r>
+                      <a:endParaRPr dirty="0"/>
+                    </a:p>
+                  </a:txBody>
+                  <a:tcPr/>
+                </a:tc>
+                <a:extLst>
+                  <a:ext uri="{0D108BD9-81ED-4DB2-BD59-A6C34878D82A}">
+                    <a16:rowId xmlns:a16="http://schemas.microsoft.com/office/drawing/2014/main" val="10000"/>
+                  </a:ext>
+                </a:extLst>
+              </a:tr>
+              <a:tr h="304800">
+                <a:tc>
+                  <a:txBody>
+                    <a:bodyPr/>
+                    <a:lstStyle/>
+                    <a:p>
+                      <a:r>
+                        <a:rPr lang="en-US" dirty="0"/>
+                        <a:t>99</a:t>
+                      </a:r>
+                      <a:endParaRPr dirty="0"/>
+                    </a:p>
+                  </a:txBody>
+                  <a:tcPr/>
+                </a:tc>
+                <a:tc>
+                  <a:txBody>
+                    <a:bodyPr/>
+                    <a:lstStyle/>
+                    <a:p>
+                      <a:r>
+                        <a:rPr lang="en-US" dirty="0"/>
+                        <a:t>89</a:t>
+                      </a:r>
+                      <a:endParaRPr dirty="0"/>
+                    </a:p>
+                  </a:txBody>
+                  <a:tcPr/>
+                </a:tc>
+                <a:tc>
+                  <a:txBody>
+                    <a:bodyPr/>
+                    <a:lstStyle/>
+                    <a:p>
+                      <a:r>
+                        <a:rPr lang="en-US" dirty="0"/>
+                        <a:t>98</a:t>
+                      </a:r>
+                      <a:endParaRPr dirty="0"/>
+                    </a:p>
+                  </a:txBody>
+                  <a:tcPr/>
+                </a:tc>
+                <a:extLst>
+                  <a:ext uri="{0D108BD9-81ED-4DB2-BD59-A6C34878D82A}">
+                    <a16:rowId xmlns:a16="http://schemas.microsoft.com/office/drawing/2014/main" val="10001"/>
+                  </a:ext>
+                </a:extLst>
+              </a:tr>
+              <a:tr h="304800">
+                <a:tc>
+                  <a:txBody>
+                    <a:bodyPr/>
+                    <a:lstStyle/>
+                    <a:p>
+                      <a:r>
+                        <a:rPr lang="en-US" dirty="0"/>
+                        <a:t>96</a:t>
+                      </a:r>
+                      <a:endParaRPr dirty="0"/>
+                    </a:p>
+                  </a:txBody>
+                  <a:tcPr/>
+                </a:tc>
+                <a:tc>
+                  <a:txBody>
+                    <a:bodyPr/>
+                    <a:lstStyle/>
+                    <a:p>
+                      <a:r>
+                        <a:rPr lang="en-US" dirty="0"/>
+                        <a:t>90</a:t>
+                      </a:r>
+                      <a:endParaRPr dirty="0"/>
+                    </a:p>
+                  </a:txBody>
+                  <a:tcPr/>
+                </a:tc>
+                <a:tc>
+                  <a:txBody>
+                    <a:bodyPr/>
+                    <a:lstStyle/>
+                    <a:p>
+                      <a:r>
+                        <a:rPr lang="en-US" dirty="0"/>
+                        <a:t>97</a:t>
+                      </a:r>
+                      <a:endParaRPr dirty="0"/>
+                    </a:p>
+                  </a:txBody>
+                  <a:tcPr/>
+                </a:tc>
+                <a:extLst>
+                  <a:ext uri="{0D108BD9-81ED-4DB2-BD59-A6C34878D82A}">
+                    <a16:rowId xmlns:a16="http://schemas.microsoft.com/office/drawing/2014/main" val="10002"/>
+                  </a:ext>
+                </a:extLst>
+              </a:tr>
+              <a:tr h="304800">
+                <a:tc>
+                  <a:txBody>
+                    <a:bodyPr/>
+                    <a:lstStyle/>
+                    <a:p>
+                      <a:r>
+                        <a:rPr lang="en-US" dirty="0"/>
+                        <a:t>95</a:t>
+                      </a:r>
+                      <a:endParaRPr dirty="0"/>
+                    </a:p>
+                  </a:txBody>
+                  <a:tcPr/>
+                </a:tc>
+                <a:tc>
+                  <a:txBody>
+                    <a:bodyPr/>
+                    <a:lstStyle/>
+                    <a:p>
+                      <a:r>
+                        <a:rPr lang="en-US" dirty="0"/>
+                        <a:t>90</a:t>
+                      </a:r>
+                      <a:endParaRPr dirty="0"/>
+                    </a:p>
+                  </a:txBody>
+                  <a:tcPr/>
+                </a:tc>
+                <a:tc>
+                  <a:txBody>
+                    <a:bodyPr/>
+                    <a:lstStyle/>
+                    <a:p>
+                      <a:r>
+                        <a:rPr lang="en-US" dirty="0"/>
+                        <a:t>94</a:t>
+                      </a:r>
+                      <a:endParaRPr dirty="0"/>
+                    </a:p>
+                  </a:txBody>
+                  <a:tcPr/>
+                </a:tc>
+                <a:extLst>
+                  <a:ext uri="{0D108BD9-81ED-4DB2-BD59-A6C34878D82A}">
+                    <a16:rowId xmlns:a16="http://schemas.microsoft.com/office/drawing/2014/main" val="10003"/>
+                  </a:ext>
+                </a:extLst>
+              </a:tr>
+              <a:tr h="304800">
+                <a:tc>
+                  <a:txBody>
+                    <a:bodyPr/>
+                    <a:lstStyle/>
+                    <a:p>
+                      <a:r>
+                        <a:rPr lang="en-US" dirty="0"/>
+                        <a:t>100</a:t>
+                      </a:r>
+                      <a:endParaRPr dirty="0"/>
+                    </a:p>
+                  </a:txBody>
+                  <a:tcPr/>
+                </a:tc>
+                <a:tc>
+                  <a:txBody>
+                    <a:bodyPr/>
+                    <a:lstStyle/>
+                    <a:p>
+                      <a:r>
+                        <a:rPr lang="en-US" dirty="0"/>
+                        <a:t>95</a:t>
+                      </a:r>
+                      <a:endParaRPr dirty="0"/>
+                    </a:p>
+                  </a:txBody>
+                  <a:tcPr/>
+                </a:tc>
+                <a:tc>
+                  <a:txBody>
+                    <a:bodyPr/>
+                    <a:lstStyle/>
+                    <a:p>
+                      <a:r>
+                        <a:rPr lang="en-US" dirty="0"/>
+                        <a:t>96</a:t>
+                      </a:r>
+                      <a:endParaRPr dirty="0"/>
+                    </a:p>
+                  </a:txBody>
+                  <a:tcPr/>
+                </a:tc>
+                <a:extLst>
+                  <a:ext uri="{0D108BD9-81ED-4DB2-BD59-A6C34878D82A}">
+                    <a16:rowId xmlns:a16="http://schemas.microsoft.com/office/drawing/2014/main" val="10004"/>
+                  </a:ext>
+                </a:extLst>
+              </a:tr>
+              <a:tr h="304800">
+                <a:tc>
+                  <a:txBody>
+                    <a:bodyPr/>
+                    <a:lstStyle/>
+                    <a:p>
+                      <a:r>
+                        <a:rPr lang="en-US" dirty="0"/>
+                        <a:t>97</a:t>
+                      </a:r>
+                      <a:endParaRPr dirty="0"/>
+                    </a:p>
+                  </a:txBody>
+                  <a:tcPr/>
+                </a:tc>
+                <a:tc>
+                  <a:txBody>
+                    <a:bodyPr/>
+                    <a:lstStyle/>
+                    <a:p>
+                      <a:r>
+                        <a:rPr lang="en-US" dirty="0"/>
+                        <a:t>94</a:t>
+                      </a:r>
+                      <a:endParaRPr dirty="0"/>
+                    </a:p>
+                  </a:txBody>
+                  <a:tcPr/>
+                </a:tc>
+                <a:tc>
+                  <a:txBody>
+                    <a:bodyPr/>
+                    <a:lstStyle/>
+                    <a:p>
+                      <a:r>
+                        <a:rPr lang="en-US" dirty="0"/>
+                        <a:t>100</a:t>
+                      </a:r>
+                      <a:endParaRPr dirty="0"/>
+                    </a:p>
+                  </a:txBody>
+                  <a:tcPr/>
+                </a:tc>
+                <a:extLst>
+                  <a:ext uri="{0D108BD9-81ED-4DB2-BD59-A6C34878D82A}">
+                    <a16:rowId xmlns:a16="http://schemas.microsoft.com/office/drawing/2014/main" val="10005"/>
+                  </a:ext>
+                </a:extLst>
+              </a:tr>
+              <a:tr h="304800">
+                <a:tc>
+                  <a:txBody>
+                    <a:bodyPr/>
+                    <a:lstStyle/>
+                    <a:p>
+                      <a:r>
+                        <a:rPr lang="en-US" dirty="0"/>
+                        <a:t>97</a:t>
+                      </a:r>
+                      <a:endParaRPr dirty="0"/>
+                    </a:p>
+                  </a:txBody>
+                  <a:tcPr/>
+                </a:tc>
+                <a:tc>
+                  <a:txBody>
+                    <a:bodyPr/>
+                    <a:lstStyle/>
+                    <a:p>
+                      <a:r>
+                        <a:rPr lang="en-US" dirty="0"/>
+                        <a:t>99</a:t>
+                      </a:r>
+                      <a:endParaRPr dirty="0"/>
+                    </a:p>
+                  </a:txBody>
+                  <a:tcPr/>
+                </a:tc>
+                <a:tc>
+                  <a:txBody>
+                    <a:bodyPr/>
+                    <a:lstStyle/>
+                    <a:p>
+                      <a:r>
+                        <a:rPr lang="en-US" dirty="0"/>
+                        <a:t>91</a:t>
+                      </a:r>
+                      <a:endParaRPr dirty="0"/>
+                    </a:p>
+                  </a:txBody>
+                  <a:tcPr/>
+                </a:tc>
+                <a:extLst>
+                  <a:ext uri="{0D108BD9-81ED-4DB2-BD59-A6C34878D82A}">
+                    <a16:rowId xmlns:a16="http://schemas.microsoft.com/office/drawing/2014/main" val="290450505"/>
+                  </a:ext>
+                </a:extLst>
+              </a:tr>
+              <a:tr h="304800">
+                <a:tc>
+                  <a:txBody>
+                    <a:bodyPr/>
+                    <a:lstStyle/>
+                    <a:p>
+                      <a:r>
+                        <a:rPr lang="en-US" dirty="0"/>
+                        <a:t>98</a:t>
+                      </a:r>
+                      <a:endParaRPr dirty="0"/>
+                    </a:p>
+                  </a:txBody>
+                  <a:tcPr/>
+                </a:tc>
+                <a:tc>
+                  <a:txBody>
+                    <a:bodyPr/>
+                    <a:lstStyle/>
+                    <a:p>
+                      <a:r>
+                        <a:rPr lang="en-US" dirty="0"/>
+                        <a:t>99</a:t>
+                      </a:r>
+                      <a:endParaRPr dirty="0"/>
+                    </a:p>
+                  </a:txBody>
+                  <a:tcPr/>
+                </a:tc>
+                <a:tc>
+                  <a:txBody>
+                    <a:bodyPr/>
+                    <a:lstStyle/>
+                    <a:p>
+                      <a:r>
+                        <a:rPr lang="en-US" dirty="0"/>
+                        <a:t>95</a:t>
+                      </a:r>
+                      <a:endParaRPr dirty="0"/>
+                    </a:p>
+                  </a:txBody>
+                  <a:tcPr/>
+                </a:tc>
+                <a:extLst>
+                  <a:ext uri="{0D108BD9-81ED-4DB2-BD59-A6C34878D82A}">
+                    <a16:rowId xmlns:a16="http://schemas.microsoft.com/office/drawing/2014/main" val="523033044"/>
+                  </a:ext>
+                </a:extLst>
+              </a:tr>
+              <a:tr h="304800">
+                <a:tc>
+                  <a:txBody>
+                    <a:bodyPr/>
+                    <a:lstStyle/>
+                    <a:p>
+                      <a:r>
+                        <a:rPr lang="en-US" dirty="0"/>
+                        <a:t>92</a:t>
+                      </a:r>
+                      <a:endParaRPr dirty="0"/>
+                    </a:p>
+                  </a:txBody>
+                  <a:tcPr/>
+                </a:tc>
+                <a:tc>
+                  <a:txBody>
+                    <a:bodyPr/>
+                    <a:lstStyle/>
+                    <a:p>
+                      <a:r>
+                        <a:rPr lang="en-US" dirty="0"/>
+                        <a:t>91</a:t>
+                      </a:r>
+                      <a:endParaRPr dirty="0"/>
+                    </a:p>
+                  </a:txBody>
+                  <a:tcPr/>
+                </a:tc>
+                <a:tc>
+                  <a:txBody>
+                    <a:bodyPr/>
+                    <a:lstStyle/>
+                    <a:p>
+                      <a:r>
+                        <a:rPr lang="en-US" dirty="0"/>
+                        <a:t>96</a:t>
+                      </a:r>
+                      <a:endParaRPr dirty="0"/>
+                    </a:p>
+                  </a:txBody>
+                  <a:tcPr/>
+                </a:tc>
+                <a:extLst>
+                  <a:ext uri="{0D108BD9-81ED-4DB2-BD59-A6C34878D82A}">
+                    <a16:rowId xmlns:a16="http://schemas.microsoft.com/office/drawing/2014/main" val="4134332731"/>
+                  </a:ext>
+                </a:extLst>
+              </a:tr>
+              <a:tr h="304800">
+                <a:tc>
+                  <a:txBody>
+                    <a:bodyPr/>
+                    <a:lstStyle/>
+                    <a:p>
+                      <a:r>
+                        <a:rPr lang="en-US" dirty="0"/>
+                        <a:t>100</a:t>
+                      </a:r>
+                      <a:endParaRPr dirty="0"/>
+                    </a:p>
+                  </a:txBody>
+                  <a:tcPr/>
+                </a:tc>
+                <a:tc>
+                  <a:txBody>
+                    <a:bodyPr/>
+                    <a:lstStyle/>
+                    <a:p>
+                      <a:r>
+                        <a:rPr lang="en-US" dirty="0"/>
+                        <a:t>92</a:t>
+                      </a:r>
+                      <a:endParaRPr dirty="0"/>
+                    </a:p>
+                  </a:txBody>
+                  <a:tcPr/>
+                </a:tc>
+                <a:tc>
+                  <a:txBody>
+                    <a:bodyPr/>
+                    <a:lstStyle/>
+                    <a:p>
+                      <a:r>
+                        <a:rPr lang="en-US" dirty="0"/>
+                        <a:t>99</a:t>
+                      </a:r>
+                      <a:endParaRPr dirty="0"/>
+                    </a:p>
+                  </a:txBody>
+                  <a:tcPr/>
+                </a:tc>
+                <a:extLst>
+                  <a:ext uri="{0D108BD9-81ED-4DB2-BD59-A6C34878D82A}">
+                    <a16:rowId xmlns:a16="http://schemas.microsoft.com/office/drawing/2014/main" val="4274703561"/>
+                  </a:ext>
+                </a:extLst>
+              </a:tr>
+              <a:tr h="304800">
+                <a:tc>
+                  <a:txBody>
+                    <a:bodyPr/>
+                    <a:lstStyle/>
+                    <a:p>
+                      <a:r>
+                        <a:rPr lang="en-US" dirty="0"/>
+                        <a:t>99</a:t>
+                      </a:r>
+                      <a:endParaRPr dirty="0"/>
+                    </a:p>
+                  </a:txBody>
+                  <a:tcPr/>
+                </a:tc>
+                <a:tc>
+                  <a:txBody>
+                    <a:bodyPr/>
+                    <a:lstStyle/>
+                    <a:p>
+                      <a:r>
+                        <a:rPr lang="en-US" dirty="0"/>
+                        <a:t>84</a:t>
+                      </a:r>
+                      <a:endParaRPr dirty="0"/>
+                    </a:p>
+                  </a:txBody>
+                  <a:tcPr/>
+                </a:tc>
+                <a:tc>
+                  <a:txBody>
+                    <a:bodyPr/>
+                    <a:lstStyle/>
+                    <a:p>
+                      <a:r>
+                        <a:rPr lang="en-US" dirty="0"/>
+                        <a:t>98</a:t>
+                      </a:r>
+                      <a:endParaRPr dirty="0"/>
+                    </a:p>
+                  </a:txBody>
+                  <a:tcPr/>
+                </a:tc>
+                <a:extLst>
+                  <a:ext uri="{0D108BD9-81ED-4DB2-BD59-A6C34878D82A}">
+                    <a16:rowId xmlns:a16="http://schemas.microsoft.com/office/drawing/2014/main" val="755594212"/>
+                  </a:ext>
+                </a:extLst>
+              </a:tr>
+            </a:tbl>
+          </a:graphicData>
+        </a:graphic>
+      </p:graphicFrame>
+    </p:spTree>
+    <p:extLst>
+      <p:ext uri="{BB962C8B-B14F-4D97-AF65-F5344CB8AC3E}">
+        <p14:creationId xmlns:p14="http://schemas.microsoft.com/office/powerpoint/2010/main" val="442059930"/>
+      </p:ext>
+    </p:extLst>
+  </p:cSld>
+  <p:clrMapOvr>
+    <a:masterClrMapping/>
+  </p:clrMapOvr>
+</p:sld>
+</file>
+
+<file path=ppt/slides/slide12.xml><?xml version="1.0" encoding="utf-8"?>
+<p:sld xmlns:a="http://schemas.openxmlformats.org/drawingml/2006/main" xmlns:r="http://schemas.openxmlformats.org/officeDocument/2006/relationships" xmlns:p="http://schemas.openxmlformats.org/presentationml/2006/main">
+  <p:cSld>
+    <p:spTree>
+      <p:nvGrpSpPr>
+        <p:cNvPr id="1" name="">
+          <a:extLst>
+            <a:ext uri="{FF2B5EF4-FFF2-40B4-BE49-F238E27FC236}">
+              <a16:creationId xmlns:a16="http://schemas.microsoft.com/office/drawing/2014/main" id="{866862BB-7222-D15E-89A1-A22D9B0129DE}"/>
+            </a:ext>
+          </a:extLst>
+        </p:cNvPr>
+        <p:cNvGrpSpPr/>
+        <p:nvPr/>
+      </p:nvGrpSpPr>
+      <p:grpSpPr>
+        <a:xfrm>
+          <a:off x="0" y="0"/>
+          <a:ext cx="0" cy="0"/>
+          <a:chOff x="0" y="0"/>
+          <a:chExt cx="0" cy="0"/>
+        </a:xfrm>
+      </p:grpSpPr>
+      <p:sp>
+        <p:nvSpPr>
+          <p:cNvPr id="2" name="Title 1">
+            <a:extLst>
+              <a:ext uri="{FF2B5EF4-FFF2-40B4-BE49-F238E27FC236}">
+                <a16:creationId xmlns:a16="http://schemas.microsoft.com/office/drawing/2014/main" id="{F7D40F85-34A4-19EA-70D2-B8D2832E7F82}"/>
+              </a:ext>
+            </a:extLst>
+          </p:cNvPr>
+          <p:cNvSpPr>
+            <a:spLocks noGrp="1"/>
+          </p:cNvSpPr>
+          <p:nvPr>
+            <p:ph type="title"/>
+          </p:nvPr>
+        </p:nvSpPr>
+        <p:spPr/>
+        <p:txBody>
+          <a:bodyPr/>
+          <a:lstStyle/>
+          <a:p>
+            <a:r>
+              <a:rPr lang="en-US" dirty="0"/>
+              <a:t>Single-Factor ANOVA</a:t>
+            </a:r>
+            <a:endParaRPr dirty="0"/>
+          </a:p>
+        </p:txBody>
+      </p:sp>
+      <p:sp>
+        <p:nvSpPr>
+          <p:cNvPr id="3" name="Content Placeholder 2">
+            <a:extLst>
+              <a:ext uri="{FF2B5EF4-FFF2-40B4-BE49-F238E27FC236}">
+                <a16:creationId xmlns:a16="http://schemas.microsoft.com/office/drawing/2014/main" id="{FAA238BD-459E-C712-A37C-6F3BFFD2C6DE}"/>
+              </a:ext>
+            </a:extLst>
+          </p:cNvPr>
+          <p:cNvSpPr>
+            <a:spLocks noGrp="1"/>
+          </p:cNvSpPr>
+          <p:nvPr>
+            <p:ph idx="1"/>
+          </p:nvPr>
+        </p:nvSpPr>
+        <p:spPr>
+          <a:xfrm>
+            <a:off x="492919" y="2356731"/>
+            <a:ext cx="8065294" cy="3766185"/>
+          </a:xfrm>
+        </p:spPr>
+        <p:txBody>
+          <a:bodyPr/>
+          <a:lstStyle/>
+          <a:p>
+            <a:pPr marL="342900" lvl="1">
+              <a:buFont typeface="Arial" panose="020B0604020202020204" pitchFamily="34" charset="0"/>
+              <a:buChar char="•"/>
+            </a:pPr>
+            <a:r>
+              <a:rPr lang="en-US" b="1" dirty="0"/>
+              <a:t>Null hypothesis (Ho): </a:t>
+            </a:r>
+            <a:r>
+              <a:rPr lang="en-US" dirty="0"/>
+              <a:t>The accuracy for all three models is the same</a:t>
+            </a:r>
+          </a:p>
+          <a:p>
+            <a:pPr marL="342900" lvl="1">
+              <a:buFont typeface="Arial" panose="020B0604020202020204" pitchFamily="34" charset="0"/>
+              <a:buChar char="•"/>
+            </a:pPr>
+            <a:r>
+              <a:rPr lang="en-US" b="1" dirty="0"/>
+              <a:t>Alternative hypothesis (Ha): </a:t>
+            </a:r>
+            <a:r>
+              <a:rPr lang="en-US" dirty="0"/>
+              <a:t>The accuracy of at least one model is different</a:t>
+            </a:r>
+          </a:p>
+          <a:p>
+            <a:pPr marL="0" lvl="1" indent="0">
+              <a:buNone/>
+            </a:pPr>
+            <a:endParaRPr lang="en-US" dirty="0"/>
+          </a:p>
+          <a:p>
+            <a:pPr lvl="1">
+              <a:buFont typeface="Arial" panose="020B0604020202020204" pitchFamily="34" charset="0"/>
+              <a:buChar char="•"/>
+            </a:pPr>
+            <a:r>
+              <a:rPr lang="en-US" dirty="0"/>
+              <a:t>Using Excel, we get p = 0.006, which is smaller than 0.05</a:t>
+            </a:r>
+          </a:p>
+          <a:p>
+            <a:pPr lvl="1">
+              <a:buFont typeface="Arial" panose="020B0604020202020204" pitchFamily="34" charset="0"/>
+              <a:buChar char="•"/>
+            </a:pPr>
+            <a:r>
+              <a:rPr lang="en-US" dirty="0"/>
+              <a:t>Therefore, we reject Ho and conclude that there is a in the accuracy of the three speech to text models</a:t>
+            </a:r>
+          </a:p>
+        </p:txBody>
+      </p:sp>
+    </p:spTree>
+    <p:extLst>
+      <p:ext uri="{BB962C8B-B14F-4D97-AF65-F5344CB8AC3E}">
+        <p14:creationId xmlns:p14="http://schemas.microsoft.com/office/powerpoint/2010/main" val="4011153851"/>
+      </p:ext>
+    </p:extLst>
+  </p:cSld>
+  <p:clrMapOvr>
+    <a:masterClrMapping/>
+  </p:clrMapOvr>
+</p:sld>
+</file>
+
+<file path=ppt/slides/slide13.xml><?xml version="1.0" encoding="utf-8"?>
+<p:sld xmlns:a="http://schemas.openxmlformats.org/drawingml/2006/main" xmlns:r="http://schemas.openxmlformats.org/officeDocument/2006/relationships" xmlns:p="http://schemas.openxmlformats.org/presentationml/2006/main">
+  <p:cSld>
+    <p:spTree>
+      <p:nvGrpSpPr>
         <p:cNvPr id="1" name=""/>
         <p:cNvGrpSpPr/>
         <p:nvPr/>
@@ -4239,7 +5420,7 @@
             </a:r>
             <a:r>
               <a:rPr lang="en-US" dirty="0"/>
-              <a:t>There is no change over time with the intervention</a:t>
+              <a:t>There is no change over time with the training</a:t>
             </a:r>
           </a:p>
           <a:p>
@@ -4266,7 +5447,7 @@
 </p:sld>
 </file>
 
-<file path=ppt/slides/slide11.xml><?xml version="1.0" encoding="utf-8"?>
+<file path=ppt/slides/slide14.xml><?xml version="1.0" encoding="utf-8"?>
 <p:sld xmlns:a="http://schemas.openxmlformats.org/drawingml/2006/main" xmlns:r="http://schemas.openxmlformats.org/officeDocument/2006/relationships" xmlns:p="http://schemas.openxmlformats.org/presentationml/2006/main">
   <p:cSld>
     <p:spTree>
@@ -4305,12 +5486,18 @@
             <p:ph type="title"/>
           </p:nvPr>
         </p:nvSpPr>
-        <p:spPr/>
+        <p:spPr>
+          <a:xfrm>
+            <a:off x="492919" y="390531"/>
+            <a:ext cx="8079581" cy="1658198"/>
+          </a:xfrm>
+        </p:spPr>
         <p:txBody>
           <a:bodyPr/>
           <a:lstStyle/>
           <a:p>
             <a:r>
+              <a:rPr dirty="0"/>
               <a:t>Matched-Pairs (Paired) Test</a:t>
             </a:r>
           </a:p>
@@ -4359,14 +5546,14 @@
           <p:nvPr>
             <p:extLst>
               <p:ext uri="{D42A27DB-BD31-4B8C-83A1-F6EECF244321}">
-                <p14:modId xmlns:p14="http://schemas.microsoft.com/office/powerpoint/2010/main" val="3666556435"/>
+                <p14:modId xmlns:p14="http://schemas.microsoft.com/office/powerpoint/2010/main" val="3788531090"/>
               </p:ext>
             </p:extLst>
           </p:nvPr>
         </p:nvGraphicFramePr>
         <p:xfrm>
-          <a:off x="726675" y="2231390"/>
-          <a:ext cx="7315200" cy="2468880"/>
+          <a:off x="726675" y="2178816"/>
+          <a:ext cx="7315200" cy="4297680"/>
         </p:xfrm>
         <a:graphic>
           <a:graphicData uri="http://schemas.openxmlformats.org/drawingml/2006/table">
@@ -4473,20 +5660,23 @@
                     <a:lstStyle/>
                     <a:p>
                       <a:r>
-                        <a:t>S1</a:t>
-                      </a:r>
-                    </a:p>
-                  </a:txBody>
-                  <a:tcPr/>
-                </a:tc>
-                <a:tc>
-                  <a:txBody>
-                    <a:bodyPr/>
-                    <a:lstStyle/>
-                    <a:p>
-                      <a:r>
-                        <a:t>5</a:t>
-                      </a:r>
+                        <a:rPr dirty="0"/>
+                        <a:t>1</a:t>
+                      </a:r>
+                    </a:p>
+                  </a:txBody>
+                  <a:tcPr/>
+                </a:tc>
+                <a:tc>
+                  <a:txBody>
+                    <a:bodyPr/>
+                    <a:lstStyle/>
+                    <a:p>
+                      <a:r>
+                        <a:rPr lang="en-US" dirty="0"/>
+                        <a:t>10</a:t>
+                      </a:r>
+                      <a:endParaRPr dirty="0"/>
                     </a:p>
                   </a:txBody>
                   <a:tcPr/>
@@ -4516,20 +5706,23 @@
                     <a:lstStyle/>
                     <a:p>
                       <a:r>
-                        <a:t>S2</a:t>
-                      </a:r>
-                    </a:p>
-                  </a:txBody>
-                  <a:tcPr/>
-                </a:tc>
-                <a:tc>
-                  <a:txBody>
-                    <a:bodyPr/>
-                    <a:lstStyle/>
-                    <a:p>
-                      <a:r>
-                        <a:t>7</a:t>
-                      </a:r>
+                        <a:rPr dirty="0"/>
+                        <a:t>2</a:t>
+                      </a:r>
+                    </a:p>
+                  </a:txBody>
+                  <a:tcPr/>
+                </a:tc>
+                <a:tc>
+                  <a:txBody>
+                    <a:bodyPr/>
+                    <a:lstStyle/>
+                    <a:p>
+                      <a:r>
+                        <a:rPr lang="en-US" dirty="0"/>
+                        <a:t>9</a:t>
+                      </a:r>
+                      <a:endParaRPr dirty="0"/>
                     </a:p>
                   </a:txBody>
                   <a:tcPr/>
@@ -4559,7 +5752,8 @@
                     <a:lstStyle/>
                     <a:p>
                       <a:r>
-                        <a:t>S3</a:t>
+                        <a:rPr dirty="0"/>
+                        <a:t>3</a:t>
                       </a:r>
                     </a:p>
                   </a:txBody>
@@ -4602,32 +5796,37 @@
                     <a:lstStyle/>
                     <a:p>
                       <a:r>
-                        <a:t>S4</a:t>
-                      </a:r>
-                    </a:p>
-                  </a:txBody>
-                  <a:tcPr/>
-                </a:tc>
-                <a:tc>
-                  <a:txBody>
-                    <a:bodyPr/>
-                    <a:lstStyle/>
-                    <a:p>
-                      <a:r>
-                        <a:t>8</a:t>
-                      </a:r>
-                    </a:p>
-                  </a:txBody>
-                  <a:tcPr/>
-                </a:tc>
-                <a:tc>
-                  <a:txBody>
-                    <a:bodyPr/>
-                    <a:lstStyle/>
-                    <a:p>
-                      <a:r>
-                        <a:t>9</a:t>
-                      </a:r>
+                        <a:rPr dirty="0"/>
+                        <a:t>4</a:t>
+                      </a:r>
+                    </a:p>
+                  </a:txBody>
+                  <a:tcPr/>
+                </a:tc>
+                <a:tc>
+                  <a:txBody>
+                    <a:bodyPr/>
+                    <a:lstStyle/>
+                    <a:p>
+                      <a:r>
+                        <a:rPr lang="en-US" dirty="0"/>
+                        <a:t>10</a:t>
+                      </a:r>
+                      <a:endParaRPr dirty="0"/>
+                    </a:p>
+                  </a:txBody>
+                  <a:tcPr/>
+                </a:tc>
+                <a:tc>
+                  <a:txBody>
+                    <a:bodyPr/>
+                    <a:lstStyle/>
+                    <a:p>
+                      <a:r>
+                        <a:rPr lang="en-US" dirty="0"/>
+                        <a:t>5</a:t>
+                      </a:r>
+                      <a:endParaRPr dirty="0"/>
                     </a:p>
                   </a:txBody>
                   <a:tcPr/>
@@ -4645,18 +5844,20 @@
                     <a:lstStyle/>
                     <a:p>
                       <a:r>
-                        <a:t>S5</a:t>
-                      </a:r>
-                    </a:p>
-                  </a:txBody>
-                  <a:tcPr/>
-                </a:tc>
-                <a:tc>
-                  <a:txBody>
-                    <a:bodyPr/>
-                    <a:lstStyle/>
-                    <a:p>
-                      <a:r>
+                        <a:rPr dirty="0"/>
+                        <a:t>5</a:t>
+                      </a:r>
+                    </a:p>
+                  </a:txBody>
+                  <a:tcPr/>
+                </a:tc>
+                <a:tc>
+                  <a:txBody>
+                    <a:bodyPr/>
+                    <a:lstStyle/>
+                    <a:p>
+                      <a:r>
+                        <a:rPr dirty="0"/>
                         <a:t>5</a:t>
                       </a:r>
                     </a:p>
@@ -4679,6 +5880,251 @@
                 <a:extLst>
                   <a:ext uri="{0D108BD9-81ED-4DB2-BD59-A6C34878D82A}">
                     <a16:rowId xmlns:a16="http://schemas.microsoft.com/office/drawing/2014/main" val="10005"/>
+                  </a:ext>
+                </a:extLst>
+              </a:tr>
+              <a:tr h="304800">
+                <a:tc>
+                  <a:txBody>
+                    <a:bodyPr/>
+                    <a:lstStyle/>
+                    <a:p>
+                      <a:r>
+                        <a:rPr lang="en-US" dirty="0"/>
+                        <a:t>6</a:t>
+                      </a:r>
+                      <a:endParaRPr dirty="0"/>
+                    </a:p>
+                  </a:txBody>
+                  <a:tcPr/>
+                </a:tc>
+                <a:tc>
+                  <a:txBody>
+                    <a:bodyPr/>
+                    <a:lstStyle/>
+                    <a:p>
+                      <a:r>
+                        <a:rPr lang="en-US" dirty="0"/>
+                        <a:t>9</a:t>
+                      </a:r>
+                      <a:endParaRPr dirty="0"/>
+                    </a:p>
+                  </a:txBody>
+                  <a:tcPr/>
+                </a:tc>
+                <a:tc>
+                  <a:txBody>
+                    <a:bodyPr/>
+                    <a:lstStyle/>
+                    <a:p>
+                      <a:r>
+                        <a:rPr lang="en-US" dirty="0"/>
+                        <a:t>9</a:t>
+                      </a:r>
+                      <a:endParaRPr dirty="0"/>
+                    </a:p>
+                  </a:txBody>
+                  <a:tcPr/>
+                </a:tc>
+                <a:extLst>
+                  <a:ext uri="{0D108BD9-81ED-4DB2-BD59-A6C34878D82A}">
+                    <a16:rowId xmlns:a16="http://schemas.microsoft.com/office/drawing/2014/main" val="3296291320"/>
+                  </a:ext>
+                </a:extLst>
+              </a:tr>
+              <a:tr h="304800">
+                <a:tc>
+                  <a:txBody>
+                    <a:bodyPr/>
+                    <a:lstStyle/>
+                    <a:p>
+                      <a:r>
+                        <a:rPr lang="en-US" dirty="0"/>
+                        <a:t>7</a:t>
+                      </a:r>
+                      <a:endParaRPr dirty="0"/>
+                    </a:p>
+                  </a:txBody>
+                  <a:tcPr/>
+                </a:tc>
+                <a:tc>
+                  <a:txBody>
+                    <a:bodyPr/>
+                    <a:lstStyle/>
+                    <a:p>
+                      <a:r>
+                        <a:rPr lang="en-US" dirty="0"/>
+                        <a:t>8</a:t>
+                      </a:r>
+                      <a:endParaRPr dirty="0"/>
+                    </a:p>
+                  </a:txBody>
+                  <a:tcPr/>
+                </a:tc>
+                <a:tc>
+                  <a:txBody>
+                    <a:bodyPr/>
+                    <a:lstStyle/>
+                    <a:p>
+                      <a:r>
+                        <a:rPr lang="en-US" dirty="0"/>
+                        <a:t>4</a:t>
+                      </a:r>
+                      <a:endParaRPr dirty="0"/>
+                    </a:p>
+                  </a:txBody>
+                  <a:tcPr/>
+                </a:tc>
+                <a:extLst>
+                  <a:ext uri="{0D108BD9-81ED-4DB2-BD59-A6C34878D82A}">
+                    <a16:rowId xmlns:a16="http://schemas.microsoft.com/office/drawing/2014/main" val="3012718209"/>
+                  </a:ext>
+                </a:extLst>
+              </a:tr>
+              <a:tr h="304800">
+                <a:tc>
+                  <a:txBody>
+                    <a:bodyPr/>
+                    <a:lstStyle/>
+                    <a:p>
+                      <a:r>
+                        <a:rPr lang="en-US" dirty="0"/>
+                        <a:t>8</a:t>
+                      </a:r>
+                      <a:endParaRPr dirty="0"/>
+                    </a:p>
+                  </a:txBody>
+                  <a:tcPr/>
+                </a:tc>
+                <a:tc>
+                  <a:txBody>
+                    <a:bodyPr/>
+                    <a:lstStyle/>
+                    <a:p>
+                      <a:r>
+                        <a:rPr lang="en-US" dirty="0"/>
+                        <a:t>7</a:t>
+                      </a:r>
+                      <a:endParaRPr dirty="0"/>
+                    </a:p>
+                  </a:txBody>
+                  <a:tcPr/>
+                </a:tc>
+                <a:tc>
+                  <a:txBody>
+                    <a:bodyPr/>
+                    <a:lstStyle/>
+                    <a:p>
+                      <a:r>
+                        <a:rPr lang="en-US" dirty="0"/>
+                        <a:t>6</a:t>
+                      </a:r>
+                      <a:endParaRPr dirty="0"/>
+                    </a:p>
+                  </a:txBody>
+                  <a:tcPr/>
+                </a:tc>
+                <a:extLst>
+                  <a:ext uri="{0D108BD9-81ED-4DB2-BD59-A6C34878D82A}">
+                    <a16:rowId xmlns:a16="http://schemas.microsoft.com/office/drawing/2014/main" val="3216059725"/>
+                  </a:ext>
+                </a:extLst>
+              </a:tr>
+              <a:tr h="304800">
+                <a:tc>
+                  <a:txBody>
+                    <a:bodyPr/>
+                    <a:lstStyle/>
+                    <a:p>
+                      <a:r>
+                        <a:rPr lang="en-US" dirty="0"/>
+                        <a:t>9</a:t>
+                      </a:r>
+                      <a:endParaRPr dirty="0"/>
+                    </a:p>
+                  </a:txBody>
+                  <a:tcPr/>
+                </a:tc>
+                <a:tc>
+                  <a:txBody>
+                    <a:bodyPr/>
+                    <a:lstStyle/>
+                    <a:p>
+                      <a:r>
+                        <a:rPr lang="en-US" dirty="0"/>
+                        <a:t>8</a:t>
+                      </a:r>
+                      <a:endParaRPr dirty="0"/>
+                    </a:p>
+                  </a:txBody>
+                  <a:tcPr/>
+                </a:tc>
+                <a:tc>
+                  <a:txBody>
+                    <a:bodyPr/>
+                    <a:lstStyle/>
+                    <a:p>
+                      <a:r>
+                        <a:rPr lang="en-US" dirty="0"/>
+                        <a:t>8</a:t>
+                      </a:r>
+                      <a:endParaRPr dirty="0"/>
+                    </a:p>
+                  </a:txBody>
+                  <a:tcPr/>
+                </a:tc>
+                <a:extLst>
+                  <a:ext uri="{0D108BD9-81ED-4DB2-BD59-A6C34878D82A}">
+                    <a16:rowId xmlns:a16="http://schemas.microsoft.com/office/drawing/2014/main" val="2191757004"/>
+                  </a:ext>
+                </a:extLst>
+              </a:tr>
+              <a:tr h="304800">
+                <a:tc>
+                  <a:txBody>
+                    <a:bodyPr/>
+                    <a:lstStyle/>
+                    <a:p>
+                      <a:r>
+                        <a:rPr lang="en-US" dirty="0"/>
+                        <a:t>10</a:t>
+                      </a:r>
+                      <a:endParaRPr dirty="0"/>
+                    </a:p>
+                  </a:txBody>
+                  <a:tcPr/>
+                </a:tc>
+                <a:tc>
+                  <a:txBody>
+                    <a:bodyPr/>
+                    <a:lstStyle/>
+                    <a:p>
+                      <a:r>
+                        <a:rPr lang="en-US" dirty="0"/>
+                        <a:t>6</a:t>
+                      </a:r>
+                      <a:endParaRPr dirty="0"/>
+                    </a:p>
+                  </a:txBody>
+                  <a:tcPr/>
+                </a:tc>
+                <a:tc>
+                  <a:txBody>
+                    <a:bodyPr/>
+                    <a:lstStyle/>
+                    <a:p>
+                      <a:r>
+                        <a:rPr lang="en-US" dirty="0"/>
+                        <a:t>7</a:t>
+                      </a:r>
+                      <a:endParaRPr dirty="0"/>
+                    </a:p>
+                  </a:txBody>
+                  <a:tcPr/>
+                </a:tc>
+                <a:extLst>
+                  <a:ext uri="{0D108BD9-81ED-4DB2-BD59-A6C34878D82A}">
+                    <a16:rowId xmlns:a16="http://schemas.microsoft.com/office/drawing/2014/main" val="3757890149"/>
                   </a:ext>
                 </a:extLst>
               </a:tr>
@@ -4699,7 +6145,1056 @@
 </p:sld>
 </file>
 
-<file path=ppt/slides/slide12.xml><?xml version="1.0" encoding="utf-8"?>
+<file path=ppt/slides/slide15.xml><?xml version="1.0" encoding="utf-8"?>
+<p:sld xmlns:a="http://schemas.openxmlformats.org/drawingml/2006/main" xmlns:r="http://schemas.openxmlformats.org/officeDocument/2006/relationships" xmlns:p="http://schemas.openxmlformats.org/presentationml/2006/main">
+  <p:cSld>
+    <p:spTree>
+      <p:nvGrpSpPr>
+        <p:cNvPr id="1" name="">
+          <a:extLst>
+            <a:ext uri="{FF2B5EF4-FFF2-40B4-BE49-F238E27FC236}">
+              <a16:creationId xmlns:a16="http://schemas.microsoft.com/office/drawing/2014/main" id="{9B57105C-1374-B89D-C26A-4764407B4090}"/>
+            </a:ext>
+          </a:extLst>
+        </p:cNvPr>
+        <p:cNvGrpSpPr/>
+        <p:nvPr/>
+      </p:nvGrpSpPr>
+      <p:grpSpPr>
+        <a:xfrm>
+          <a:off x="0" y="0"/>
+          <a:ext cx="0" cy="0"/>
+          <a:chOff x="0" y="0"/>
+          <a:chExt cx="0" cy="0"/>
+        </a:xfrm>
+      </p:grpSpPr>
+      <p:sp>
+        <p:nvSpPr>
+          <p:cNvPr id="2" name="Title 1">
+            <a:extLst>
+              <a:ext uri="{FF2B5EF4-FFF2-40B4-BE49-F238E27FC236}">
+                <a16:creationId xmlns:a16="http://schemas.microsoft.com/office/drawing/2014/main" id="{23DB1946-490A-FE5A-90E9-7447B3C74A1D}"/>
+              </a:ext>
+            </a:extLst>
+          </p:cNvPr>
+          <p:cNvSpPr>
+            <a:spLocks noGrp="1"/>
+          </p:cNvSpPr>
+          <p:nvPr>
+            <p:ph type="title"/>
+          </p:nvPr>
+        </p:nvSpPr>
+        <p:spPr>
+          <a:xfrm>
+            <a:off x="492919" y="390531"/>
+            <a:ext cx="8079581" cy="1658198"/>
+          </a:xfrm>
+        </p:spPr>
+        <p:txBody>
+          <a:bodyPr/>
+          <a:lstStyle/>
+          <a:p>
+            <a:r>
+              <a:rPr dirty="0"/>
+              <a:t>Matched-Pairs (Paired) Test</a:t>
+            </a:r>
+          </a:p>
+        </p:txBody>
+      </p:sp>
+      <p:sp>
+        <p:nvSpPr>
+          <p:cNvPr id="3" name="Content Placeholder 2">
+            <a:extLst>
+              <a:ext uri="{FF2B5EF4-FFF2-40B4-BE49-F238E27FC236}">
+                <a16:creationId xmlns:a16="http://schemas.microsoft.com/office/drawing/2014/main" id="{29B3D3D1-E237-8825-F97D-B8AC2C22F992}"/>
+              </a:ext>
+            </a:extLst>
+          </p:cNvPr>
+          <p:cNvSpPr>
+            <a:spLocks noGrp="1"/>
+          </p:cNvSpPr>
+          <p:nvPr>
+            <p:ph idx="1"/>
+          </p:nvPr>
+        </p:nvSpPr>
+        <p:spPr/>
+        <p:txBody>
+          <a:bodyPr/>
+          <a:lstStyle/>
+          <a:p>
+            <a:endParaRPr dirty="0"/>
+          </a:p>
+          <a:p>
+            <a:endParaRPr dirty="0"/>
+          </a:p>
+        </p:txBody>
+      </p:sp>
+      <p:graphicFrame>
+        <p:nvGraphicFramePr>
+          <p:cNvPr id="5" name="Table 4">
+            <a:extLst>
+              <a:ext uri="{FF2B5EF4-FFF2-40B4-BE49-F238E27FC236}">
+                <a16:creationId xmlns:a16="http://schemas.microsoft.com/office/drawing/2014/main" id="{BE9F7E89-9803-066B-4B2F-BB5DD5EA9E8A}"/>
+              </a:ext>
+            </a:extLst>
+          </p:cNvPr>
+          <p:cNvGraphicFramePr>
+            <a:graphicFrameLocks noGrp="1"/>
+          </p:cNvGraphicFramePr>
+          <p:nvPr>
+            <p:extLst>
+              <p:ext uri="{D42A27DB-BD31-4B8C-83A1-F6EECF244321}">
+                <p14:modId xmlns:p14="http://schemas.microsoft.com/office/powerpoint/2010/main" val="109170891"/>
+              </p:ext>
+            </p:extLst>
+          </p:nvPr>
+        </p:nvGraphicFramePr>
+        <p:xfrm>
+          <a:off x="726675" y="2178816"/>
+          <a:ext cx="7315200" cy="4297680"/>
+        </p:xfrm>
+        <a:graphic>
+          <a:graphicData uri="http://schemas.openxmlformats.org/drawingml/2006/table">
+            <a:tbl>
+              <a:tblPr firstRow="1" bandRow="1">
+                <a:tableStyleId>{5C22544A-7EE6-4342-B048-85BDC9FD1C3A}</a:tableStyleId>
+              </a:tblPr>
+              <a:tblGrid>
+                <a:gridCol w="1828800">
+                  <a:extLst>
+                    <a:ext uri="{9D8B030D-6E8A-4147-A177-3AD203B41FA5}">
+                      <a16:colId xmlns:a16="http://schemas.microsoft.com/office/drawing/2014/main" val="20000"/>
+                    </a:ext>
+                  </a:extLst>
+                </a:gridCol>
+                <a:gridCol w="1828800">
+                  <a:extLst>
+                    <a:ext uri="{9D8B030D-6E8A-4147-A177-3AD203B41FA5}">
+                      <a16:colId xmlns:a16="http://schemas.microsoft.com/office/drawing/2014/main" val="20001"/>
+                    </a:ext>
+                  </a:extLst>
+                </a:gridCol>
+                <a:gridCol w="1828800">
+                  <a:extLst>
+                    <a:ext uri="{9D8B030D-6E8A-4147-A177-3AD203B41FA5}">
+                      <a16:colId xmlns:a16="http://schemas.microsoft.com/office/drawing/2014/main" val="20002"/>
+                    </a:ext>
+                  </a:extLst>
+                </a:gridCol>
+                <a:gridCol w="1828800">
+                  <a:extLst>
+                    <a:ext uri="{9D8B030D-6E8A-4147-A177-3AD203B41FA5}">
+                      <a16:colId xmlns:a16="http://schemas.microsoft.com/office/drawing/2014/main" val="2884592779"/>
+                    </a:ext>
+                  </a:extLst>
+                </a:gridCol>
+              </a:tblGrid>
+              <a:tr h="304800">
+                <a:tc>
+                  <a:txBody>
+                    <a:bodyPr/>
+                    <a:lstStyle/>
+                    <a:p>
+                      <a:pPr algn="ctr"/>
+                      <a:r>
+                        <a:rPr lang="en-US" dirty="0"/>
+                        <a:t>Participant</a:t>
+                      </a:r>
+                      <a:endParaRPr dirty="0"/>
+                    </a:p>
+                  </a:txBody>
+                  <a:tcPr/>
+                </a:tc>
+                <a:tc>
+                  <a:txBody>
+                    <a:bodyPr/>
+                    <a:lstStyle/>
+                    <a:p>
+                      <a:pPr algn="ctr"/>
+                      <a:r>
+                        <a:rPr dirty="0"/>
+                        <a:t>Before</a:t>
+                      </a:r>
+                      <a:r>
+                        <a:rPr lang="en-US" dirty="0"/>
+                        <a:t> Training</a:t>
+                      </a:r>
+                    </a:p>
+                    <a:p>
+                      <a:pPr algn="ctr"/>
+                      <a:r>
+                        <a:rPr lang="en-US" dirty="0"/>
+                        <a:t>Minutes</a:t>
+                      </a:r>
+                      <a:endParaRPr dirty="0"/>
+                    </a:p>
+                  </a:txBody>
+                  <a:tcPr/>
+                </a:tc>
+                <a:tc>
+                  <a:txBody>
+                    <a:bodyPr/>
+                    <a:lstStyle/>
+                    <a:p>
+                      <a:pPr algn="ctr"/>
+                      <a:r>
+                        <a:rPr dirty="0"/>
+                        <a:t>After</a:t>
+                      </a:r>
+                      <a:r>
+                        <a:rPr lang="en-US" dirty="0"/>
+                        <a:t> Training</a:t>
+                      </a:r>
+                    </a:p>
+                    <a:p>
+                      <a:pPr algn="ctr"/>
+                      <a:r>
+                        <a:rPr lang="en-US" dirty="0"/>
+                        <a:t>Minutes</a:t>
+                      </a:r>
+                      <a:endParaRPr dirty="0"/>
+                    </a:p>
+                  </a:txBody>
+                  <a:tcPr/>
+                </a:tc>
+                <a:tc>
+                  <a:txBody>
+                    <a:bodyPr/>
+                    <a:lstStyle/>
+                    <a:p>
+                      <a:pPr algn="ctr"/>
+                      <a:r>
+                        <a:rPr lang="en-US" dirty="0"/>
+                        <a:t>Difference</a:t>
+                      </a:r>
+                      <a:endParaRPr dirty="0"/>
+                    </a:p>
+                  </a:txBody>
+                  <a:tcPr/>
+                </a:tc>
+                <a:extLst>
+                  <a:ext uri="{0D108BD9-81ED-4DB2-BD59-A6C34878D82A}">
+                    <a16:rowId xmlns:a16="http://schemas.microsoft.com/office/drawing/2014/main" val="10000"/>
+                  </a:ext>
+                </a:extLst>
+              </a:tr>
+              <a:tr h="304800">
+                <a:tc>
+                  <a:txBody>
+                    <a:bodyPr/>
+                    <a:lstStyle/>
+                    <a:p>
+                      <a:pPr algn="ctr"/>
+                      <a:r>
+                        <a:rPr dirty="0"/>
+                        <a:t>1</a:t>
+                      </a:r>
+                    </a:p>
+                  </a:txBody>
+                  <a:tcPr/>
+                </a:tc>
+                <a:tc>
+                  <a:txBody>
+                    <a:bodyPr/>
+                    <a:lstStyle/>
+                    <a:p>
+                      <a:pPr algn="ctr"/>
+                      <a:r>
+                        <a:rPr lang="en-US" dirty="0"/>
+                        <a:t>10</a:t>
+                      </a:r>
+                      <a:endParaRPr dirty="0"/>
+                    </a:p>
+                  </a:txBody>
+                  <a:tcPr/>
+                </a:tc>
+                <a:tc>
+                  <a:txBody>
+                    <a:bodyPr/>
+                    <a:lstStyle/>
+                    <a:p>
+                      <a:pPr algn="ctr"/>
+                      <a:r>
+                        <a:t>6</a:t>
+                      </a:r>
+                    </a:p>
+                  </a:txBody>
+                  <a:tcPr/>
+                </a:tc>
+                <a:tc>
+                  <a:txBody>
+                    <a:bodyPr/>
+                    <a:lstStyle/>
+                    <a:p>
+                      <a:pPr algn="ctr"/>
+                      <a:r>
+                        <a:rPr lang="en-US" dirty="0"/>
+                        <a:t>4</a:t>
+                      </a:r>
+                      <a:endParaRPr dirty="0"/>
+                    </a:p>
+                  </a:txBody>
+                  <a:tcPr/>
+                </a:tc>
+                <a:extLst>
+                  <a:ext uri="{0D108BD9-81ED-4DB2-BD59-A6C34878D82A}">
+                    <a16:rowId xmlns:a16="http://schemas.microsoft.com/office/drawing/2014/main" val="10001"/>
+                  </a:ext>
+                </a:extLst>
+              </a:tr>
+              <a:tr h="304800">
+                <a:tc>
+                  <a:txBody>
+                    <a:bodyPr/>
+                    <a:lstStyle/>
+                    <a:p>
+                      <a:pPr algn="ctr"/>
+                      <a:r>
+                        <a:rPr dirty="0"/>
+                        <a:t>2</a:t>
+                      </a:r>
+                    </a:p>
+                  </a:txBody>
+                  <a:tcPr/>
+                </a:tc>
+                <a:tc>
+                  <a:txBody>
+                    <a:bodyPr/>
+                    <a:lstStyle/>
+                    <a:p>
+                      <a:pPr algn="ctr"/>
+                      <a:r>
+                        <a:rPr lang="en-US" dirty="0"/>
+                        <a:t>9</a:t>
+                      </a:r>
+                      <a:endParaRPr dirty="0"/>
+                    </a:p>
+                  </a:txBody>
+                  <a:tcPr/>
+                </a:tc>
+                <a:tc>
+                  <a:txBody>
+                    <a:bodyPr/>
+                    <a:lstStyle/>
+                    <a:p>
+                      <a:pPr algn="ctr"/>
+                      <a:r>
+                        <a:rPr dirty="0"/>
+                        <a:t>8</a:t>
+                      </a:r>
+                    </a:p>
+                  </a:txBody>
+                  <a:tcPr/>
+                </a:tc>
+                <a:tc>
+                  <a:txBody>
+                    <a:bodyPr/>
+                    <a:lstStyle/>
+                    <a:p>
+                      <a:pPr algn="ctr"/>
+                      <a:r>
+                        <a:rPr lang="en-US" dirty="0"/>
+                        <a:t>1</a:t>
+                      </a:r>
+                      <a:endParaRPr dirty="0"/>
+                    </a:p>
+                  </a:txBody>
+                  <a:tcPr/>
+                </a:tc>
+                <a:extLst>
+                  <a:ext uri="{0D108BD9-81ED-4DB2-BD59-A6C34878D82A}">
+                    <a16:rowId xmlns:a16="http://schemas.microsoft.com/office/drawing/2014/main" val="10002"/>
+                  </a:ext>
+                </a:extLst>
+              </a:tr>
+              <a:tr h="304800">
+                <a:tc>
+                  <a:txBody>
+                    <a:bodyPr/>
+                    <a:lstStyle/>
+                    <a:p>
+                      <a:pPr algn="ctr"/>
+                      <a:r>
+                        <a:rPr dirty="0"/>
+                        <a:t>3</a:t>
+                      </a:r>
+                    </a:p>
+                  </a:txBody>
+                  <a:tcPr/>
+                </a:tc>
+                <a:tc>
+                  <a:txBody>
+                    <a:bodyPr/>
+                    <a:lstStyle/>
+                    <a:p>
+                      <a:pPr algn="ctr"/>
+                      <a:r>
+                        <a:t>6</a:t>
+                      </a:r>
+                    </a:p>
+                  </a:txBody>
+                  <a:tcPr/>
+                </a:tc>
+                <a:tc>
+                  <a:txBody>
+                    <a:bodyPr/>
+                    <a:lstStyle/>
+                    <a:p>
+                      <a:pPr algn="ctr"/>
+                      <a:r>
+                        <a:rPr dirty="0"/>
+                        <a:t>7</a:t>
+                      </a:r>
+                    </a:p>
+                  </a:txBody>
+                  <a:tcPr/>
+                </a:tc>
+                <a:tc>
+                  <a:txBody>
+                    <a:bodyPr/>
+                    <a:lstStyle/>
+                    <a:p>
+                      <a:pPr algn="ctr"/>
+                      <a:r>
+                        <a:rPr lang="en-US" dirty="0"/>
+                        <a:t>-1</a:t>
+                      </a:r>
+                      <a:endParaRPr dirty="0"/>
+                    </a:p>
+                  </a:txBody>
+                  <a:tcPr/>
+                </a:tc>
+                <a:extLst>
+                  <a:ext uri="{0D108BD9-81ED-4DB2-BD59-A6C34878D82A}">
+                    <a16:rowId xmlns:a16="http://schemas.microsoft.com/office/drawing/2014/main" val="10003"/>
+                  </a:ext>
+                </a:extLst>
+              </a:tr>
+              <a:tr h="304800">
+                <a:tc>
+                  <a:txBody>
+                    <a:bodyPr/>
+                    <a:lstStyle/>
+                    <a:p>
+                      <a:pPr algn="ctr"/>
+                      <a:r>
+                        <a:rPr dirty="0"/>
+                        <a:t>4</a:t>
+                      </a:r>
+                    </a:p>
+                  </a:txBody>
+                  <a:tcPr/>
+                </a:tc>
+                <a:tc>
+                  <a:txBody>
+                    <a:bodyPr/>
+                    <a:lstStyle/>
+                    <a:p>
+                      <a:pPr algn="ctr"/>
+                      <a:r>
+                        <a:rPr lang="en-US" dirty="0"/>
+                        <a:t>10</a:t>
+                      </a:r>
+                      <a:endParaRPr dirty="0"/>
+                    </a:p>
+                  </a:txBody>
+                  <a:tcPr/>
+                </a:tc>
+                <a:tc>
+                  <a:txBody>
+                    <a:bodyPr/>
+                    <a:lstStyle/>
+                    <a:p>
+                      <a:pPr algn="ctr"/>
+                      <a:r>
+                        <a:rPr lang="en-US" dirty="0"/>
+                        <a:t>5</a:t>
+                      </a:r>
+                      <a:endParaRPr dirty="0"/>
+                    </a:p>
+                  </a:txBody>
+                  <a:tcPr/>
+                </a:tc>
+                <a:tc>
+                  <a:txBody>
+                    <a:bodyPr/>
+                    <a:lstStyle/>
+                    <a:p>
+                      <a:pPr algn="ctr"/>
+                      <a:r>
+                        <a:rPr lang="en-US" dirty="0"/>
+                        <a:t>5</a:t>
+                      </a:r>
+                      <a:endParaRPr dirty="0"/>
+                    </a:p>
+                  </a:txBody>
+                  <a:tcPr/>
+                </a:tc>
+                <a:extLst>
+                  <a:ext uri="{0D108BD9-81ED-4DB2-BD59-A6C34878D82A}">
+                    <a16:rowId xmlns:a16="http://schemas.microsoft.com/office/drawing/2014/main" val="10004"/>
+                  </a:ext>
+                </a:extLst>
+              </a:tr>
+              <a:tr h="304800">
+                <a:tc>
+                  <a:txBody>
+                    <a:bodyPr/>
+                    <a:lstStyle/>
+                    <a:p>
+                      <a:pPr algn="ctr"/>
+                      <a:r>
+                        <a:rPr dirty="0"/>
+                        <a:t>5</a:t>
+                      </a:r>
+                    </a:p>
+                  </a:txBody>
+                  <a:tcPr/>
+                </a:tc>
+                <a:tc>
+                  <a:txBody>
+                    <a:bodyPr/>
+                    <a:lstStyle/>
+                    <a:p>
+                      <a:pPr algn="ctr"/>
+                      <a:r>
+                        <a:rPr dirty="0"/>
+                        <a:t>5</a:t>
+                      </a:r>
+                    </a:p>
+                  </a:txBody>
+                  <a:tcPr/>
+                </a:tc>
+                <a:tc>
+                  <a:txBody>
+                    <a:bodyPr/>
+                    <a:lstStyle/>
+                    <a:p>
+                      <a:pPr algn="ctr"/>
+                      <a:r>
+                        <a:rPr dirty="0"/>
+                        <a:t>6</a:t>
+                      </a:r>
+                    </a:p>
+                  </a:txBody>
+                  <a:tcPr/>
+                </a:tc>
+                <a:tc>
+                  <a:txBody>
+                    <a:bodyPr/>
+                    <a:lstStyle/>
+                    <a:p>
+                      <a:pPr algn="ctr"/>
+                      <a:r>
+                        <a:rPr lang="en-US" dirty="0"/>
+                        <a:t>-1</a:t>
+                      </a:r>
+                      <a:endParaRPr dirty="0"/>
+                    </a:p>
+                  </a:txBody>
+                  <a:tcPr/>
+                </a:tc>
+                <a:extLst>
+                  <a:ext uri="{0D108BD9-81ED-4DB2-BD59-A6C34878D82A}">
+                    <a16:rowId xmlns:a16="http://schemas.microsoft.com/office/drawing/2014/main" val="10005"/>
+                  </a:ext>
+                </a:extLst>
+              </a:tr>
+              <a:tr h="304800">
+                <a:tc>
+                  <a:txBody>
+                    <a:bodyPr/>
+                    <a:lstStyle/>
+                    <a:p>
+                      <a:pPr algn="ctr"/>
+                      <a:r>
+                        <a:rPr lang="en-US" dirty="0"/>
+                        <a:t>6</a:t>
+                      </a:r>
+                      <a:endParaRPr dirty="0"/>
+                    </a:p>
+                  </a:txBody>
+                  <a:tcPr/>
+                </a:tc>
+                <a:tc>
+                  <a:txBody>
+                    <a:bodyPr/>
+                    <a:lstStyle/>
+                    <a:p>
+                      <a:pPr algn="ctr"/>
+                      <a:r>
+                        <a:rPr lang="en-US" dirty="0"/>
+                        <a:t>9</a:t>
+                      </a:r>
+                      <a:endParaRPr dirty="0"/>
+                    </a:p>
+                  </a:txBody>
+                  <a:tcPr/>
+                </a:tc>
+                <a:tc>
+                  <a:txBody>
+                    <a:bodyPr/>
+                    <a:lstStyle/>
+                    <a:p>
+                      <a:pPr algn="ctr"/>
+                      <a:r>
+                        <a:rPr lang="en-US" dirty="0"/>
+                        <a:t>9</a:t>
+                      </a:r>
+                      <a:endParaRPr dirty="0"/>
+                    </a:p>
+                  </a:txBody>
+                  <a:tcPr/>
+                </a:tc>
+                <a:tc>
+                  <a:txBody>
+                    <a:bodyPr/>
+                    <a:lstStyle/>
+                    <a:p>
+                      <a:pPr algn="ctr"/>
+                      <a:r>
+                        <a:rPr lang="en-US" dirty="0"/>
+                        <a:t>0</a:t>
+                      </a:r>
+                      <a:endParaRPr dirty="0"/>
+                    </a:p>
+                  </a:txBody>
+                  <a:tcPr/>
+                </a:tc>
+                <a:extLst>
+                  <a:ext uri="{0D108BD9-81ED-4DB2-BD59-A6C34878D82A}">
+                    <a16:rowId xmlns:a16="http://schemas.microsoft.com/office/drawing/2014/main" val="3296291320"/>
+                  </a:ext>
+                </a:extLst>
+              </a:tr>
+              <a:tr h="304800">
+                <a:tc>
+                  <a:txBody>
+                    <a:bodyPr/>
+                    <a:lstStyle/>
+                    <a:p>
+                      <a:pPr algn="ctr"/>
+                      <a:r>
+                        <a:rPr lang="en-US" dirty="0"/>
+                        <a:t>7</a:t>
+                      </a:r>
+                      <a:endParaRPr dirty="0"/>
+                    </a:p>
+                  </a:txBody>
+                  <a:tcPr/>
+                </a:tc>
+                <a:tc>
+                  <a:txBody>
+                    <a:bodyPr/>
+                    <a:lstStyle/>
+                    <a:p>
+                      <a:pPr algn="ctr"/>
+                      <a:r>
+                        <a:rPr lang="en-US" dirty="0"/>
+                        <a:t>8</a:t>
+                      </a:r>
+                      <a:endParaRPr dirty="0"/>
+                    </a:p>
+                  </a:txBody>
+                  <a:tcPr/>
+                </a:tc>
+                <a:tc>
+                  <a:txBody>
+                    <a:bodyPr/>
+                    <a:lstStyle/>
+                    <a:p>
+                      <a:pPr algn="ctr"/>
+                      <a:r>
+                        <a:rPr lang="en-US" dirty="0"/>
+                        <a:t>4</a:t>
+                      </a:r>
+                      <a:endParaRPr dirty="0"/>
+                    </a:p>
+                  </a:txBody>
+                  <a:tcPr/>
+                </a:tc>
+                <a:tc>
+                  <a:txBody>
+                    <a:bodyPr/>
+                    <a:lstStyle/>
+                    <a:p>
+                      <a:pPr algn="ctr"/>
+                      <a:r>
+                        <a:rPr lang="en-US" dirty="0"/>
+                        <a:t>4</a:t>
+                      </a:r>
+                      <a:endParaRPr dirty="0"/>
+                    </a:p>
+                  </a:txBody>
+                  <a:tcPr/>
+                </a:tc>
+                <a:extLst>
+                  <a:ext uri="{0D108BD9-81ED-4DB2-BD59-A6C34878D82A}">
+                    <a16:rowId xmlns:a16="http://schemas.microsoft.com/office/drawing/2014/main" val="3012718209"/>
+                  </a:ext>
+                </a:extLst>
+              </a:tr>
+              <a:tr h="304800">
+                <a:tc>
+                  <a:txBody>
+                    <a:bodyPr/>
+                    <a:lstStyle/>
+                    <a:p>
+                      <a:pPr algn="ctr"/>
+                      <a:r>
+                        <a:rPr lang="en-US" dirty="0"/>
+                        <a:t>8</a:t>
+                      </a:r>
+                      <a:endParaRPr dirty="0"/>
+                    </a:p>
+                  </a:txBody>
+                  <a:tcPr/>
+                </a:tc>
+                <a:tc>
+                  <a:txBody>
+                    <a:bodyPr/>
+                    <a:lstStyle/>
+                    <a:p>
+                      <a:pPr algn="ctr"/>
+                      <a:r>
+                        <a:rPr lang="en-US" dirty="0"/>
+                        <a:t>7</a:t>
+                      </a:r>
+                      <a:endParaRPr dirty="0"/>
+                    </a:p>
+                  </a:txBody>
+                  <a:tcPr/>
+                </a:tc>
+                <a:tc>
+                  <a:txBody>
+                    <a:bodyPr/>
+                    <a:lstStyle/>
+                    <a:p>
+                      <a:pPr algn="ctr"/>
+                      <a:r>
+                        <a:rPr lang="en-US" dirty="0"/>
+                        <a:t>6</a:t>
+                      </a:r>
+                      <a:endParaRPr dirty="0"/>
+                    </a:p>
+                  </a:txBody>
+                  <a:tcPr/>
+                </a:tc>
+                <a:tc>
+                  <a:txBody>
+                    <a:bodyPr/>
+                    <a:lstStyle/>
+                    <a:p>
+                      <a:pPr algn="ctr"/>
+                      <a:r>
+                        <a:rPr lang="en-US" dirty="0"/>
+                        <a:t>1</a:t>
+                      </a:r>
+                      <a:endParaRPr dirty="0"/>
+                    </a:p>
+                  </a:txBody>
+                  <a:tcPr/>
+                </a:tc>
+                <a:extLst>
+                  <a:ext uri="{0D108BD9-81ED-4DB2-BD59-A6C34878D82A}">
+                    <a16:rowId xmlns:a16="http://schemas.microsoft.com/office/drawing/2014/main" val="3216059725"/>
+                  </a:ext>
+                </a:extLst>
+              </a:tr>
+              <a:tr h="304800">
+                <a:tc>
+                  <a:txBody>
+                    <a:bodyPr/>
+                    <a:lstStyle/>
+                    <a:p>
+                      <a:pPr algn="ctr"/>
+                      <a:r>
+                        <a:rPr lang="en-US" dirty="0"/>
+                        <a:t>9</a:t>
+                      </a:r>
+                      <a:endParaRPr dirty="0"/>
+                    </a:p>
+                  </a:txBody>
+                  <a:tcPr/>
+                </a:tc>
+                <a:tc>
+                  <a:txBody>
+                    <a:bodyPr/>
+                    <a:lstStyle/>
+                    <a:p>
+                      <a:pPr algn="ctr"/>
+                      <a:r>
+                        <a:rPr lang="en-US" dirty="0"/>
+                        <a:t>8</a:t>
+                      </a:r>
+                      <a:endParaRPr dirty="0"/>
+                    </a:p>
+                  </a:txBody>
+                  <a:tcPr/>
+                </a:tc>
+                <a:tc>
+                  <a:txBody>
+                    <a:bodyPr/>
+                    <a:lstStyle/>
+                    <a:p>
+                      <a:pPr algn="ctr"/>
+                      <a:r>
+                        <a:rPr lang="en-US" dirty="0"/>
+                        <a:t>8</a:t>
+                      </a:r>
+                      <a:endParaRPr dirty="0"/>
+                    </a:p>
+                  </a:txBody>
+                  <a:tcPr/>
+                </a:tc>
+                <a:tc>
+                  <a:txBody>
+                    <a:bodyPr/>
+                    <a:lstStyle/>
+                    <a:p>
+                      <a:pPr algn="ctr"/>
+                      <a:r>
+                        <a:rPr lang="en-US" dirty="0"/>
+                        <a:t>0</a:t>
+                      </a:r>
+                      <a:endParaRPr dirty="0"/>
+                    </a:p>
+                  </a:txBody>
+                  <a:tcPr/>
+                </a:tc>
+                <a:extLst>
+                  <a:ext uri="{0D108BD9-81ED-4DB2-BD59-A6C34878D82A}">
+                    <a16:rowId xmlns:a16="http://schemas.microsoft.com/office/drawing/2014/main" val="2191757004"/>
+                  </a:ext>
+                </a:extLst>
+              </a:tr>
+              <a:tr h="304800">
+                <a:tc>
+                  <a:txBody>
+                    <a:bodyPr/>
+                    <a:lstStyle/>
+                    <a:p>
+                      <a:pPr algn="ctr"/>
+                      <a:r>
+                        <a:rPr lang="en-US" dirty="0"/>
+                        <a:t>10</a:t>
+                      </a:r>
+                      <a:endParaRPr dirty="0"/>
+                    </a:p>
+                  </a:txBody>
+                  <a:tcPr/>
+                </a:tc>
+                <a:tc>
+                  <a:txBody>
+                    <a:bodyPr/>
+                    <a:lstStyle/>
+                    <a:p>
+                      <a:pPr algn="ctr"/>
+                      <a:r>
+                        <a:rPr lang="en-US" dirty="0"/>
+                        <a:t>6</a:t>
+                      </a:r>
+                      <a:endParaRPr dirty="0"/>
+                    </a:p>
+                  </a:txBody>
+                  <a:tcPr/>
+                </a:tc>
+                <a:tc>
+                  <a:txBody>
+                    <a:bodyPr/>
+                    <a:lstStyle/>
+                    <a:p>
+                      <a:pPr algn="ctr"/>
+                      <a:r>
+                        <a:rPr lang="en-US" dirty="0"/>
+                        <a:t>7</a:t>
+                      </a:r>
+                      <a:endParaRPr dirty="0"/>
+                    </a:p>
+                  </a:txBody>
+                  <a:tcPr/>
+                </a:tc>
+                <a:tc>
+                  <a:txBody>
+                    <a:bodyPr/>
+                    <a:lstStyle/>
+                    <a:p>
+                      <a:pPr algn="ctr"/>
+                      <a:r>
+                        <a:rPr lang="en-US" dirty="0"/>
+                        <a:t>-1</a:t>
+                      </a:r>
+                      <a:endParaRPr dirty="0"/>
+                    </a:p>
+                  </a:txBody>
+                  <a:tcPr/>
+                </a:tc>
+                <a:extLst>
+                  <a:ext uri="{0D108BD9-81ED-4DB2-BD59-A6C34878D82A}">
+                    <a16:rowId xmlns:a16="http://schemas.microsoft.com/office/drawing/2014/main" val="3757890149"/>
+                  </a:ext>
+                </a:extLst>
+              </a:tr>
+            </a:tbl>
+          </a:graphicData>
+        </a:graphic>
+      </p:graphicFrame>
+    </p:spTree>
+    <p:extLst>
+      <p:ext uri="{BB962C8B-B14F-4D97-AF65-F5344CB8AC3E}">
+        <p14:creationId xmlns:p14="http://schemas.microsoft.com/office/powerpoint/2010/main" val="1830195825"/>
+      </p:ext>
+    </p:extLst>
+  </p:cSld>
+  <p:clrMapOvr>
+    <a:masterClrMapping/>
+  </p:clrMapOvr>
+</p:sld>
+</file>
+
+<file path=ppt/slides/slide16.xml><?xml version="1.0" encoding="utf-8"?>
+<p:sld xmlns:a="http://schemas.openxmlformats.org/drawingml/2006/main" xmlns:r="http://schemas.openxmlformats.org/officeDocument/2006/relationships" xmlns:p="http://schemas.openxmlformats.org/presentationml/2006/main">
+  <p:cSld>
+    <p:spTree>
+      <p:nvGrpSpPr>
+        <p:cNvPr id="1" name="">
+          <a:extLst>
+            <a:ext uri="{FF2B5EF4-FFF2-40B4-BE49-F238E27FC236}">
+              <a16:creationId xmlns:a16="http://schemas.microsoft.com/office/drawing/2014/main" id="{2FA1DB15-11C8-F0CC-A1A8-0B28293BCA2C}"/>
+            </a:ext>
+          </a:extLst>
+        </p:cNvPr>
+        <p:cNvGrpSpPr/>
+        <p:nvPr/>
+      </p:nvGrpSpPr>
+      <p:grpSpPr>
+        <a:xfrm>
+          <a:off x="0" y="0"/>
+          <a:ext cx="0" cy="0"/>
+          <a:chOff x="0" y="0"/>
+          <a:chExt cx="0" cy="0"/>
+        </a:xfrm>
+      </p:grpSpPr>
+      <p:sp>
+        <p:nvSpPr>
+          <p:cNvPr id="2" name="Title 1">
+            <a:extLst>
+              <a:ext uri="{FF2B5EF4-FFF2-40B4-BE49-F238E27FC236}">
+                <a16:creationId xmlns:a16="http://schemas.microsoft.com/office/drawing/2014/main" id="{461F1EA5-1745-B40B-A7E6-4E230267C860}"/>
+              </a:ext>
+            </a:extLst>
+          </p:cNvPr>
+          <p:cNvSpPr>
+            <a:spLocks noGrp="1"/>
+          </p:cNvSpPr>
+          <p:nvPr>
+            <p:ph type="title"/>
+          </p:nvPr>
+        </p:nvSpPr>
+        <p:spPr/>
+        <p:txBody>
+          <a:bodyPr/>
+          <a:lstStyle/>
+          <a:p>
+            <a:r>
+              <a:t>Matched-Pairs (Paired) Test</a:t>
+            </a:r>
+          </a:p>
+        </p:txBody>
+      </p:sp>
+      <p:sp>
+        <p:nvSpPr>
+          <p:cNvPr id="3" name="Content Placeholder 2">
+            <a:extLst>
+              <a:ext uri="{FF2B5EF4-FFF2-40B4-BE49-F238E27FC236}">
+                <a16:creationId xmlns:a16="http://schemas.microsoft.com/office/drawing/2014/main" id="{A2A75406-C5CC-D7B4-0FDA-AE4EEFE9AB76}"/>
+              </a:ext>
+            </a:extLst>
+          </p:cNvPr>
+          <p:cNvSpPr>
+            <a:spLocks noGrp="1"/>
+          </p:cNvSpPr>
+          <p:nvPr>
+            <p:ph idx="1"/>
+          </p:nvPr>
+        </p:nvSpPr>
+        <p:spPr/>
+        <p:txBody>
+          <a:bodyPr/>
+          <a:lstStyle/>
+          <a:p>
+            <a:endParaRPr dirty="0"/>
+          </a:p>
+          <a:p>
+            <a:pPr marL="342900" lvl="1">
+              <a:buFont typeface="Arial" panose="020B0604020202020204" pitchFamily="34" charset="0"/>
+              <a:buChar char="•"/>
+            </a:pPr>
+            <a:r>
+              <a:rPr lang="en-US" b="1" dirty="0"/>
+              <a:t>Null hypothesis (Ho): </a:t>
+            </a:r>
+            <a:r>
+              <a:rPr lang="en-US" dirty="0"/>
+              <a:t>There is no change over time with the training</a:t>
+            </a:r>
+          </a:p>
+          <a:p>
+            <a:pPr marL="342900" lvl="1">
+              <a:buFont typeface="Arial" panose="020B0604020202020204" pitchFamily="34" charset="0"/>
+              <a:buChar char="•"/>
+            </a:pPr>
+            <a:r>
+              <a:rPr lang="en-US" b="1" dirty="0"/>
+              <a:t>Alternative hypothesis (Ha): </a:t>
+            </a:r>
+            <a:r>
+              <a:rPr lang="en-US" dirty="0"/>
+              <a:t>There is change over time</a:t>
+            </a:r>
+          </a:p>
+          <a:p>
+            <a:pPr marL="0" lvl="1" indent="0">
+              <a:buNone/>
+            </a:pPr>
+            <a:endParaRPr lang="en-US" dirty="0"/>
+          </a:p>
+          <a:p>
+            <a:pPr lvl="1">
+              <a:buFont typeface="Arial" panose="020B0604020202020204" pitchFamily="34" charset="0"/>
+              <a:buChar char="•"/>
+            </a:pPr>
+            <a:r>
+              <a:rPr lang="en-US" dirty="0"/>
+              <a:t>Using Excel, we get p = 0.07, which is larger than 0.05</a:t>
+            </a:r>
+          </a:p>
+          <a:p>
+            <a:pPr lvl="1">
+              <a:buFont typeface="Arial" panose="020B0604020202020204" pitchFamily="34" charset="0"/>
+              <a:buChar char="•"/>
+            </a:pPr>
+            <a:r>
+              <a:rPr lang="en-US" dirty="0"/>
+              <a:t>Therefore, we fail to reject Ho and conclude that there is no difference in the time it took to complete the travel expense report before and after training</a:t>
+            </a:r>
+          </a:p>
+        </p:txBody>
+      </p:sp>
+    </p:spTree>
+    <p:extLst>
+      <p:ext uri="{BB962C8B-B14F-4D97-AF65-F5344CB8AC3E}">
+        <p14:creationId xmlns:p14="http://schemas.microsoft.com/office/powerpoint/2010/main" val="653985383"/>
+      </p:ext>
+    </p:extLst>
+  </p:cSld>
+  <p:clrMapOvr>
+    <a:masterClrMapping/>
+  </p:clrMapOvr>
+</p:sld>
+</file>
+
+<file path=ppt/slides/slide17.xml><?xml version="1.0" encoding="utf-8"?>
 <p:sld xmlns:a="http://schemas.openxmlformats.org/drawingml/2006/main" xmlns:r="http://schemas.openxmlformats.org/officeDocument/2006/relationships" xmlns:p="http://schemas.openxmlformats.org/presentationml/2006/main">
   <p:cSld>
     <p:spTree>
@@ -4821,7 +7316,7 @@
 </p:sld>
 </file>
 
-<file path=ppt/slides/slide13.xml><?xml version="1.0" encoding="utf-8"?>
+<file path=ppt/slides/slide18.xml><?xml version="1.0" encoding="utf-8"?>
 <p:sld xmlns:a="http://schemas.openxmlformats.org/drawingml/2006/main" xmlns:r="http://schemas.openxmlformats.org/officeDocument/2006/relationships" xmlns:p="http://schemas.openxmlformats.org/presentationml/2006/main">
   <p:cSld>
     <p:spTree>
@@ -5256,7 +7751,7 @@
 </p:sld>
 </file>
 
-<file path=ppt/slides/slide14.xml><?xml version="1.0" encoding="utf-8"?>
+<file path=ppt/slides/slide19.xml><?xml version="1.0" encoding="utf-8"?>
 <p:sld xmlns:a="http://schemas.openxmlformats.org/drawingml/2006/main" xmlns:r="http://schemas.openxmlformats.org/officeDocument/2006/relationships" xmlns:p="http://schemas.openxmlformats.org/presentationml/2006/main">
   <p:cSld>
     <p:spTree>
@@ -5677,7 +8172,121 @@
 </p:sld>
 </file>
 
-<file path=ppt/slides/slide15.xml><?xml version="1.0" encoding="utf-8"?>
+<file path=ppt/slides/slide2.xml><?xml version="1.0" encoding="utf-8"?>
+<p:sld xmlns:a="http://schemas.openxmlformats.org/drawingml/2006/main" xmlns:r="http://schemas.openxmlformats.org/officeDocument/2006/relationships" xmlns:p="http://schemas.openxmlformats.org/presentationml/2006/main">
+  <p:cSld>
+    <p:spTree>
+      <p:nvGrpSpPr>
+        <p:cNvPr id="1" name=""/>
+        <p:cNvGrpSpPr/>
+        <p:nvPr/>
+      </p:nvGrpSpPr>
+      <p:grpSpPr>
+        <a:xfrm>
+          <a:off x="0" y="0"/>
+          <a:ext cx="0" cy="0"/>
+          <a:chOff x="0" y="0"/>
+          <a:chExt cx="0" cy="0"/>
+        </a:xfrm>
+      </p:grpSpPr>
+      <p:sp>
+        <p:nvSpPr>
+          <p:cNvPr id="2" name="Title 1"/>
+          <p:cNvSpPr>
+            <a:spLocks noGrp="1"/>
+          </p:cNvSpPr>
+          <p:nvPr>
+            <p:ph type="title"/>
+          </p:nvPr>
+        </p:nvSpPr>
+        <p:spPr/>
+        <p:txBody>
+          <a:bodyPr/>
+          <a:lstStyle/>
+          <a:p>
+            <a:r>
+              <a:t>Agenda</a:t>
+            </a:r>
+          </a:p>
+        </p:txBody>
+      </p:sp>
+      <p:sp>
+        <p:nvSpPr>
+          <p:cNvPr id="3" name="Content Placeholder 2"/>
+          <p:cNvSpPr>
+            <a:spLocks noGrp="1"/>
+          </p:cNvSpPr>
+          <p:nvPr>
+            <p:ph idx="1"/>
+          </p:nvPr>
+        </p:nvSpPr>
+        <p:spPr/>
+        <p:txBody>
+          <a:bodyPr/>
+          <a:lstStyle/>
+          <a:p>
+            <a:pPr lvl="1">
+              <a:buFont typeface="Arial" panose="020B0604020202020204" pitchFamily="34" charset="0"/>
+              <a:buChar char="•"/>
+            </a:pPr>
+            <a:r>
+              <a:rPr lang="en-US" dirty="0"/>
+              <a:t>What is a statistical hypothesis test?</a:t>
+            </a:r>
+          </a:p>
+          <a:p>
+            <a:pPr lvl="1">
+              <a:buFont typeface="Arial" panose="020B0604020202020204" pitchFamily="34" charset="0"/>
+              <a:buChar char="•"/>
+            </a:pPr>
+            <a:r>
+              <a:rPr dirty="0"/>
+              <a:t>Independent Samples t-test</a:t>
+            </a:r>
+            <a:endParaRPr lang="en-US" dirty="0"/>
+          </a:p>
+          <a:p>
+            <a:pPr lvl="1">
+              <a:buFont typeface="Arial" panose="020B0604020202020204" pitchFamily="34" charset="0"/>
+              <a:buChar char="•"/>
+            </a:pPr>
+            <a:r>
+              <a:rPr lang="en-US" dirty="0"/>
+              <a:t>ANOVA</a:t>
+            </a:r>
+          </a:p>
+          <a:p>
+            <a:pPr lvl="1">
+              <a:buFont typeface="Arial" panose="020B0604020202020204" pitchFamily="34" charset="0"/>
+              <a:buChar char="•"/>
+            </a:pPr>
+            <a:r>
+              <a:rPr dirty="0"/>
+              <a:t>Matched-Pairs Test</a:t>
+            </a:r>
+            <a:endParaRPr lang="en-US" dirty="0"/>
+          </a:p>
+          <a:p>
+            <a:pPr lvl="1">
+              <a:buFont typeface="Arial" panose="020B0604020202020204" pitchFamily="34" charset="0"/>
+              <a:buChar char="•"/>
+            </a:pPr>
+            <a:r>
+              <a:rPr dirty="0"/>
+              <a:t>Chi-Square Test</a:t>
+            </a:r>
+          </a:p>
+        </p:txBody>
+      </p:sp>
+    </p:spTree>
+  </p:cSld>
+  <p:clrMapOvr>
+    <a:masterClrMapping/>
+  </p:clrMapOvr>
+</p:sld>
+</file>
+
+<file path=ppt/slides/slide20.xml><?xml version="1.0" encoding="utf-8"?>
 <p:sld xmlns:a="http://schemas.openxmlformats.org/drawingml/2006/main" xmlns:r="http://schemas.openxmlformats.org/officeDocument/2006/relationships" xmlns:p="http://schemas.openxmlformats.org/presentationml/2006/main">
   <p:cSld>
     <p:spTree>
@@ -6087,7 +8696,7 @@
 </p:sld>
 </file>
 
-<file path=ppt/slides/slide16.xml><?xml version="1.0" encoding="utf-8"?>
+<file path=ppt/slides/slide21.xml><?xml version="1.0" encoding="utf-8"?>
 <p:sld xmlns:a="http://schemas.openxmlformats.org/drawingml/2006/main" xmlns:r="http://schemas.openxmlformats.org/officeDocument/2006/relationships" xmlns:p="http://schemas.openxmlformats.org/presentationml/2006/main">
   <p:cSld>
     <p:spTree>
@@ -6497,7 +9106,7 @@
 </p:sld>
 </file>
 
-<file path=ppt/slides/slide17.xml><?xml version="1.0" encoding="utf-8"?>
+<file path=ppt/slides/slide22.xml><?xml version="1.0" encoding="utf-8"?>
 <p:sld xmlns:a="http://schemas.openxmlformats.org/drawingml/2006/main" xmlns:r="http://schemas.openxmlformats.org/officeDocument/2006/relationships" xmlns:p="http://schemas.openxmlformats.org/presentationml/2006/main">
   <p:cSld>
     <p:spTree>
@@ -6970,7 +9579,7 @@
 </p:sld>
 </file>
 
-<file path=ppt/slides/slide18.xml><?xml version="1.0" encoding="utf-8"?>
+<file path=ppt/slides/slide23.xml><?xml version="1.0" encoding="utf-8"?>
 <p:sld xmlns:a="http://schemas.openxmlformats.org/drawingml/2006/main" xmlns:r="http://schemas.openxmlformats.org/officeDocument/2006/relationships" xmlns:p="http://schemas.openxmlformats.org/presentationml/2006/main">
   <p:cSld>
     <p:spTree>
@@ -7374,7 +9983,7 @@
 </p:sld>
 </file>
 
-<file path=ppt/slides/slide19.xml><?xml version="1.0" encoding="utf-8"?>
+<file path=ppt/slides/slide24.xml><?xml version="1.0" encoding="utf-8"?>
 <p:sld xmlns:a="http://schemas.openxmlformats.org/drawingml/2006/main" xmlns:r="http://schemas.openxmlformats.org/officeDocument/2006/relationships" xmlns:p="http://schemas.openxmlformats.org/presentationml/2006/main">
   <p:cSld>
     <p:spTree>
@@ -7815,121 +10424,7 @@
 </p:sld>
 </file>
 
-<file path=ppt/slides/slide2.xml><?xml version="1.0" encoding="utf-8"?>
-<p:sld xmlns:a="http://schemas.openxmlformats.org/drawingml/2006/main" xmlns:r="http://schemas.openxmlformats.org/officeDocument/2006/relationships" xmlns:p="http://schemas.openxmlformats.org/presentationml/2006/main">
-  <p:cSld>
-    <p:spTree>
-      <p:nvGrpSpPr>
-        <p:cNvPr id="1" name=""/>
-        <p:cNvGrpSpPr/>
-        <p:nvPr/>
-      </p:nvGrpSpPr>
-      <p:grpSpPr>
-        <a:xfrm>
-          <a:off x="0" y="0"/>
-          <a:ext cx="0" cy="0"/>
-          <a:chOff x="0" y="0"/>
-          <a:chExt cx="0" cy="0"/>
-        </a:xfrm>
-      </p:grpSpPr>
-      <p:sp>
-        <p:nvSpPr>
-          <p:cNvPr id="2" name="Title 1"/>
-          <p:cNvSpPr>
-            <a:spLocks noGrp="1"/>
-          </p:cNvSpPr>
-          <p:nvPr>
-            <p:ph type="title"/>
-          </p:nvPr>
-        </p:nvSpPr>
-        <p:spPr/>
-        <p:txBody>
-          <a:bodyPr/>
-          <a:lstStyle/>
-          <a:p>
-            <a:r>
-              <a:t>Agenda</a:t>
-            </a:r>
-          </a:p>
-        </p:txBody>
-      </p:sp>
-      <p:sp>
-        <p:nvSpPr>
-          <p:cNvPr id="3" name="Content Placeholder 2"/>
-          <p:cNvSpPr>
-            <a:spLocks noGrp="1"/>
-          </p:cNvSpPr>
-          <p:nvPr>
-            <p:ph idx="1"/>
-          </p:nvPr>
-        </p:nvSpPr>
-        <p:spPr/>
-        <p:txBody>
-          <a:bodyPr/>
-          <a:lstStyle/>
-          <a:p>
-            <a:pPr lvl="1">
-              <a:buFont typeface="Arial" panose="020B0604020202020204" pitchFamily="34" charset="0"/>
-              <a:buChar char="•"/>
-            </a:pPr>
-            <a:r>
-              <a:rPr lang="en-US" dirty="0"/>
-              <a:t>What is a statistical hypothesis test?</a:t>
-            </a:r>
-          </a:p>
-          <a:p>
-            <a:pPr lvl="1">
-              <a:buFont typeface="Arial" panose="020B0604020202020204" pitchFamily="34" charset="0"/>
-              <a:buChar char="•"/>
-            </a:pPr>
-            <a:r>
-              <a:rPr dirty="0"/>
-              <a:t>Independent Samples t-test</a:t>
-            </a:r>
-            <a:endParaRPr lang="en-US" dirty="0"/>
-          </a:p>
-          <a:p>
-            <a:pPr lvl="1">
-              <a:buFont typeface="Arial" panose="020B0604020202020204" pitchFamily="34" charset="0"/>
-              <a:buChar char="•"/>
-            </a:pPr>
-            <a:r>
-              <a:rPr lang="en-US" dirty="0"/>
-              <a:t>ANOVA</a:t>
-            </a:r>
-          </a:p>
-          <a:p>
-            <a:pPr lvl="1">
-              <a:buFont typeface="Arial" panose="020B0604020202020204" pitchFamily="34" charset="0"/>
-              <a:buChar char="•"/>
-            </a:pPr>
-            <a:r>
-              <a:rPr dirty="0"/>
-              <a:t>Matched-Pairs Test</a:t>
-            </a:r>
-            <a:endParaRPr lang="en-US" dirty="0"/>
-          </a:p>
-          <a:p>
-            <a:pPr lvl="1">
-              <a:buFont typeface="Arial" panose="020B0604020202020204" pitchFamily="34" charset="0"/>
-              <a:buChar char="•"/>
-            </a:pPr>
-            <a:r>
-              <a:rPr dirty="0"/>
-              <a:t>Chi-Square Test</a:t>
-            </a:r>
-          </a:p>
-        </p:txBody>
-      </p:sp>
-    </p:spTree>
-  </p:cSld>
-  <p:clrMapOvr>
-    <a:masterClrMapping/>
-  </p:clrMapOvr>
-</p:sld>
-</file>
-
-<file path=ppt/slides/slide20.xml><?xml version="1.0" encoding="utf-8"?>
+<file path=ppt/slides/slide25.xml><?xml version="1.0" encoding="utf-8"?>
 <p:sld xmlns:a="http://schemas.openxmlformats.org/drawingml/2006/main" xmlns:r="http://schemas.openxmlformats.org/officeDocument/2006/relationships" xmlns:p="http://schemas.openxmlformats.org/presentationml/2006/main">
   <p:cSld>
     <p:spTree>
@@ -8358,7 +10853,7 @@
 </p:sld>
 </file>
 
-<file path=ppt/slides/slide21.xml><?xml version="1.0" encoding="utf-8"?>
+<file path=ppt/slides/slide26.xml><?xml version="1.0" encoding="utf-8"?>
 <p:sld xmlns:a="http://schemas.openxmlformats.org/drawingml/2006/main" xmlns:r="http://schemas.openxmlformats.org/officeDocument/2006/relationships" xmlns:p="http://schemas.openxmlformats.org/presentationml/2006/main">
   <p:cSld>
     <p:spTree>
@@ -8778,7 +11273,7 @@
 </p:sld>
 </file>
 
-<file path=ppt/slides/slide22.xml><?xml version="1.0" encoding="utf-8"?>
+<file path=ppt/slides/slide27.xml><?xml version="1.0" encoding="utf-8"?>
 <p:sld xmlns:a="http://schemas.openxmlformats.org/drawingml/2006/main" xmlns:r="http://schemas.openxmlformats.org/officeDocument/2006/relationships" xmlns:p="http://schemas.openxmlformats.org/presentationml/2006/main">
   <p:cSld>
     <p:spTree>
@@ -8916,6 +11411,66 @@
           </a:p>
         </p:txBody>
       </p:sp>
+      <p:sp>
+        <p:nvSpPr>
+          <p:cNvPr id="3" name="Content Placeholder 2"/>
+          <p:cNvSpPr>
+            <a:spLocks noGrp="1"/>
+          </p:cNvSpPr>
+          <p:nvPr>
+            <p:ph idx="1"/>
+          </p:nvPr>
+        </p:nvSpPr>
+        <p:spPr>
+          <a:xfrm>
+            <a:off x="3526917" y="2011680"/>
+            <a:ext cx="4821746" cy="3766185"/>
+          </a:xfrm>
+        </p:spPr>
+        <p:txBody>
+          <a:bodyPr>
+            <a:normAutofit/>
+          </a:bodyPr>
+          <a:lstStyle/>
+          <a:p>
+            <a:endParaRPr dirty="0"/>
+          </a:p>
+          <a:p>
+            <a:pPr marL="0" indent="0">
+              <a:buNone/>
+            </a:pPr>
+            <a:r>
+              <a:rPr dirty="0"/>
+              <a:t>Helps us tell if patterns in our data are real or just random</a:t>
+            </a:r>
+            <a:endParaRPr lang="en-US" dirty="0"/>
+          </a:p>
+          <a:p>
+            <a:pPr marL="0" indent="0">
+              <a:buNone/>
+            </a:pPr>
+            <a:endParaRPr lang="en-US" dirty="0"/>
+          </a:p>
+          <a:p>
+            <a:pPr marL="0" indent="0">
+              <a:buNone/>
+            </a:pPr>
+            <a:r>
+              <a:rPr dirty="0"/>
+              <a:t>Turns questions about UX changes into clear yes/no answers</a:t>
+            </a:r>
+          </a:p>
+          <a:p>
+            <a:endParaRPr lang="en-US" dirty="0"/>
+          </a:p>
+          <a:p>
+            <a:r>
+              <a:rPr dirty="0"/>
+              <a:t>Supports confident decisions based on data</a:t>
+            </a:r>
+          </a:p>
+        </p:txBody>
+      </p:sp>
       <p:pic>
         <p:nvPicPr>
           <p:cNvPr id="5" name="Picture 4" descr="Angled shot of pen on a graph">
@@ -8947,66 +11502,6 @@
           </a:prstGeom>
         </p:spPr>
       </p:pic>
-      <p:sp>
-        <p:nvSpPr>
-          <p:cNvPr id="3" name="Content Placeholder 2"/>
-          <p:cNvSpPr>
-            <a:spLocks noGrp="1"/>
-          </p:cNvSpPr>
-          <p:nvPr>
-            <p:ph idx="1"/>
-          </p:nvPr>
-        </p:nvSpPr>
-        <p:spPr>
-          <a:xfrm>
-            <a:off x="3526917" y="2011680"/>
-            <a:ext cx="4821746" cy="3766185"/>
-          </a:xfrm>
-        </p:spPr>
-        <p:txBody>
-          <a:bodyPr>
-            <a:normAutofit/>
-          </a:bodyPr>
-          <a:lstStyle/>
-          <a:p>
-            <a:endParaRPr dirty="0"/>
-          </a:p>
-          <a:p>
-            <a:pPr marL="0" indent="0">
-              <a:buNone/>
-            </a:pPr>
-            <a:r>
-              <a:rPr dirty="0"/>
-              <a:t>Helps us tell if patterns in our data are real or just random</a:t>
-            </a:r>
-            <a:endParaRPr lang="en-US" dirty="0"/>
-          </a:p>
-          <a:p>
-            <a:pPr marL="0" indent="0">
-              <a:buNone/>
-            </a:pPr>
-            <a:endParaRPr lang="en-US" dirty="0"/>
-          </a:p>
-          <a:p>
-            <a:pPr marL="0" indent="0">
-              <a:buNone/>
-            </a:pPr>
-            <a:r>
-              <a:rPr dirty="0"/>
-              <a:t>Turns questions about UX changes into clear yes/no answers</a:t>
-            </a:r>
-          </a:p>
-          <a:p>
-            <a:endParaRPr lang="en-US" dirty="0"/>
-          </a:p>
-          <a:p>
-            <a:r>
-              <a:rPr dirty="0"/>
-              <a:t>Supports confident decisions based on data</a:t>
-            </a:r>
-          </a:p>
-        </p:txBody>
-      </p:sp>
     </p:spTree>
   </p:cSld>
   <p:clrMapOvr>
@@ -9168,11 +11663,7 @@
           <a:lstStyle/>
           <a:p>
             <a:r>
-              <a:rPr lang="en-US">
-                <a:solidFill>
-                  <a:srgbClr val="5A573C"/>
-                </a:solidFill>
-              </a:rPr>
+              <a:rPr lang="en-US" dirty="0"/>
               <a:t>Steps in a Hypothesis Test</a:t>
             </a:r>
           </a:p>
@@ -9311,11 +11802,7 @@
           <a:lstStyle/>
           <a:p>
             <a:r>
-              <a:rPr lang="en-US">
-                <a:solidFill>
-                  <a:srgbClr val="63463E"/>
-                </a:solidFill>
-              </a:rPr>
+              <a:rPr lang="en-US" dirty="0"/>
               <a:t>Everyday Analogy</a:t>
             </a:r>
           </a:p>
@@ -9343,25 +11830,29 @@
           </a:bodyPr>
           <a:lstStyle/>
           <a:p>
-            <a:endParaRPr/>
-          </a:p>
-          <a:p>
-            <a:r>
+            <a:endParaRPr dirty="0"/>
+          </a:p>
+          <a:p>
+            <a:r>
+              <a:rPr dirty="0"/>
               <a:t>Flipping a fair coin: expect half heads, half tails.</a:t>
             </a:r>
           </a:p>
           <a:p>
             <a:r>
+              <a:rPr dirty="0"/>
               <a:t>If you get 9 heads in 10 flips, you'd be surprised.</a:t>
             </a:r>
           </a:p>
           <a:p>
             <a:r>
+              <a:rPr dirty="0"/>
               <a:t>A low p‑value (&lt; 0.05) means 'wow, that's unlikely by chance!'</a:t>
             </a:r>
           </a:p>
           <a:p>
             <a:r>
+              <a:rPr dirty="0"/>
               <a:t>UX example: A big jump in clicks might be a 'wow' moment.</a:t>
             </a:r>
           </a:p>
@@ -9490,6 +11981,16 @@
               <a:buChar char="•"/>
             </a:pPr>
             <a:r>
+              <a:rPr lang="en-US" dirty="0"/>
+              <a:t>Assume unequal variance because we don’t know if the variability within each group is the same or not</a:t>
+            </a:r>
+          </a:p>
+          <a:p>
+            <a:pPr marL="342900" lvl="1">
+              <a:buFont typeface="Arial" panose="020B0604020202020204" pitchFamily="34" charset="0"/>
+              <a:buChar char="•"/>
+            </a:pPr>
+            <a:r>
               <a:rPr lang="en-US" b="1" dirty="0"/>
               <a:t>Null hypothesis (Ho): </a:t>
             </a:r>
@@ -9622,7 +12123,7 @@
           <p:nvPr>
             <p:extLst>
               <p:ext uri="{D42A27DB-BD31-4B8C-83A1-F6EECF244321}">
-                <p14:modId xmlns:p14="http://schemas.microsoft.com/office/powerpoint/2010/main" val="922303505"/>
+                <p14:modId xmlns:p14="http://schemas.microsoft.com/office/powerpoint/2010/main" val="2517725548"/>
               </p:ext>
             </p:extLst>
           </p:nvPr>
@@ -9775,8 +12276,10 @@
                     <a:lstStyle/>
                     <a:p>
                       <a:r>
-                        <a:t>25</a:t>
-                      </a:r>
+                        <a:rPr lang="en-US" dirty="0"/>
+                        <a:t>31</a:t>
+                      </a:r>
+                      <a:endParaRPr dirty="0"/>
                     </a:p>
                   </a:txBody>
                   <a:tcPr/>
@@ -9806,6 +12309,7 @@
                     <a:lstStyle/>
                     <a:p>
                       <a:r>
+                        <a:rPr dirty="0"/>
                         <a:t>30</a:t>
                       </a:r>
                     </a:p>
@@ -9838,8 +12342,13 @@
                     <a:p>
                       <a:r>
                         <a:rPr dirty="0"/>
-                        <a:t>22</a:t>
-                      </a:r>
+                        <a:t>2</a:t>
+                      </a:r>
+                      <a:r>
+                        <a:rPr lang="en-US" dirty="0"/>
+                        <a:t>4</a:t>
+                      </a:r>
+                      <a:endParaRPr dirty="0"/>
                     </a:p>
                   </a:txBody>
                   <a:tcPr/>
@@ -9941,7 +12450,7 @@
                     <a:p>
                       <a:r>
                         <a:rPr lang="en-US" dirty="0"/>
-                        <a:t>22</a:t>
+                        <a:t>29</a:t>
                       </a:r>
                       <a:endParaRPr dirty="0"/>
                     </a:p>
@@ -10063,7 +12572,7 @@
         <p:cNvPr id="1" name="">
           <a:extLst>
             <a:ext uri="{FF2B5EF4-FFF2-40B4-BE49-F238E27FC236}">
-              <a16:creationId xmlns:a16="http://schemas.microsoft.com/office/drawing/2014/main" id="{3ABDC6F5-9954-BE95-FD95-4C66A1548B7B}"/>
+              <a16:creationId xmlns:a16="http://schemas.microsoft.com/office/drawing/2014/main" id="{0AE27E90-F26D-3A99-46B7-4E9D1ADB2CF6}"/>
             </a:ext>
           </a:extLst>
         </p:cNvPr>
@@ -10083,7 +12592,7 @@
           <p:cNvPr id="2" name="Title 1">
             <a:extLst>
               <a:ext uri="{FF2B5EF4-FFF2-40B4-BE49-F238E27FC236}">
-                <a16:creationId xmlns:a16="http://schemas.microsoft.com/office/drawing/2014/main" id="{4E1B4B84-A660-6AD3-68CD-D26D1B2F17C5}"/>
+                <a16:creationId xmlns:a16="http://schemas.microsoft.com/office/drawing/2014/main" id="{C0875434-48A6-F8CE-78E6-5D183AA1381F}"/>
               </a:ext>
             </a:extLst>
           </p:cNvPr>
@@ -10101,7 +12610,7 @@
           <a:p>
             <a:r>
               <a:rPr lang="en-US" dirty="0"/>
-              <a:t>ANOVA</a:t>
+              <a:t>Two Independent Samples t-test</a:t>
             </a:r>
             <a:endParaRPr dirty="0"/>
           </a:p>
@@ -10112,7 +12621,7 @@
           <p:cNvPr id="3" name="Content Placeholder 2">
             <a:extLst>
               <a:ext uri="{FF2B5EF4-FFF2-40B4-BE49-F238E27FC236}">
-                <a16:creationId xmlns:a16="http://schemas.microsoft.com/office/drawing/2014/main" id="{F9AE6BB2-F41E-1537-6DDC-1072C26E702B}"/>
+                <a16:creationId xmlns:a16="http://schemas.microsoft.com/office/drawing/2014/main" id="{38C69DD6-6CEB-6622-224B-09720EB3487C}"/>
               </a:ext>
             </a:extLst>
           </p:cNvPr>
@@ -10123,7 +12632,12 @@
             <p:ph idx="1"/>
           </p:nvPr>
         </p:nvSpPr>
-        <p:spPr/>
+        <p:spPr>
+          <a:xfrm>
+            <a:off x="492919" y="2356731"/>
+            <a:ext cx="8065294" cy="3766185"/>
+          </a:xfrm>
+        </p:spPr>
         <p:txBody>
           <a:bodyPr/>
           <a:lstStyle/>
@@ -10133,18 +12647,13 @@
               <a:buChar char="•"/>
             </a:pPr>
             <a:r>
-              <a:rPr dirty="0"/>
-              <a:t>Compare means of</a:t>
+              <a:rPr lang="en-US" b="1" dirty="0"/>
+              <a:t>Null hypothesis (Ho): </a:t>
             </a:r>
             <a:r>
               <a:rPr lang="en-US" dirty="0"/>
-              <a:t> more than</a:t>
-            </a:r>
-            <a:r>
-              <a:rPr dirty="0"/>
-              <a:t> two independent groups</a:t>
-            </a:r>
-            <a:endParaRPr lang="en-US" dirty="0"/>
+              <a:t>The mean game play time for both apps is the same</a:t>
+            </a:r>
           </a:p>
           <a:p>
             <a:pPr marL="342900" lvl="1">
@@ -10152,49 +12661,63 @@
               <a:buChar char="•"/>
             </a:pPr>
             <a:r>
-              <a:rPr lang="en-US"/>
-              <a:t>Test three </a:t>
+              <a:rPr lang="en-US" b="1" dirty="0"/>
+              <a:t>Alternative hypothesis (Ha): </a:t>
             </a:r>
             <a:r>
               <a:rPr lang="en-US" dirty="0"/>
-              <a:t>versions of a mobile game with two groups of people to see if the two versions hold players’ attention for different amounts of time</a:t>
-            </a:r>
-          </a:p>
-          <a:p>
-            <a:pPr marL="342900" lvl="1">
+              <a:t>The mean game play for both apps is different</a:t>
+            </a:r>
+          </a:p>
+          <a:p>
+            <a:pPr marL="0" lvl="1" indent="0">
+              <a:buNone/>
+            </a:pPr>
+            <a:endParaRPr lang="en-US" dirty="0"/>
+          </a:p>
+          <a:p>
+            <a:pPr lvl="1">
               <a:buFont typeface="Arial" panose="020B0604020202020204" pitchFamily="34" charset="0"/>
               <a:buChar char="•"/>
             </a:pPr>
             <a:r>
-              <a:rPr lang="en-US" b="1" dirty="0"/>
-              <a:t>Null hypothesis (Ho): </a:t>
-            </a:r>
-            <a:r>
               <a:rPr lang="en-US" dirty="0"/>
-              <a:t>The mean game play time for both apps is the same</a:t>
-            </a:r>
-          </a:p>
-          <a:p>
-            <a:pPr marL="342900" lvl="1">
+              <a:t>Using Excel, we get p = 0.02, which is smaller than 0.05</a:t>
+            </a:r>
+          </a:p>
+          <a:p>
+            <a:pPr lvl="1">
               <a:buFont typeface="Arial" panose="020B0604020202020204" pitchFamily="34" charset="0"/>
               <a:buChar char="•"/>
             </a:pPr>
             <a:r>
-              <a:rPr lang="en-US" b="1" dirty="0"/>
-              <a:t>Alternative hypothesis (Ha): </a:t>
+              <a:rPr lang="en-US"/>
+              <a:t>Therefore</a:t>
             </a:r>
             <a:r>
               <a:rPr lang="en-US" dirty="0"/>
-              <a:t>The mean game play for both apps is different</a:t>
-            </a:r>
-            <a:endParaRPr dirty="0"/>
+              <a:t>, we reject Ho and conclude that the </a:t>
+            </a:r>
+            <a:r>
+              <a:rPr lang="en-US"/>
+              <a:t>mean game-play </a:t>
+            </a:r>
+            <a:r>
+              <a:rPr lang="en-US" dirty="0"/>
+              <a:t>time for the two apps </a:t>
+            </a:r>
+            <a:r>
+              <a:rPr lang="en-US"/>
+              <a:t>is different</a:t>
+            </a:r>
+            <a:endParaRPr lang="en-US" dirty="0"/>
           </a:p>
         </p:txBody>
       </p:sp>
     </p:spTree>
     <p:extLst>
       <p:ext uri="{BB962C8B-B14F-4D97-AF65-F5344CB8AC3E}">
-        <p14:creationId xmlns:p14="http://schemas.microsoft.com/office/powerpoint/2010/main" val="3203151447"/>
+        <p14:creationId xmlns:p14="http://schemas.microsoft.com/office/powerpoint/2010/main" val="1349712774"/>
       </p:ext>
     </p:extLst>
   </p:cSld>
